--- a/Népesség 2025.pptx
+++ b/Népesség 2025.pptx
@@ -9,9 +9,6 @@
     <p:sldId id="257" r:id="rId3"/>
     <p:sldId id="258" r:id="rId4"/>
     <p:sldId id="259" r:id="rId5"/>
-    <p:sldId id="260" r:id="rId6"/>
-    <p:sldId id="261" r:id="rId7"/>
-    <p:sldId id="262" r:id="rId8"/>
   </p:sldIdLst>
   <p:sldSz cx="12192000" cy="6858000"/>
   <p:notesSz cx="6858000" cy="9144000"/>
@@ -110,6 +107,11 @@
       </a:defRPr>
     </a:lvl9pPr>
   </p:defaultTextStyle>
+  <p:extLst>
+    <p:ext uri="{EFAFB233-063F-42B5-8137-9DF3F51BA10A}">
+      <p15:sldGuideLst xmlns:p15="http://schemas.microsoft.com/office/powerpoint/2012/main"/>
+    </p:ext>
+  </p:extLst>
 </p:presentation>
 </file>
 
@@ -260,7 +262,7 @@
           <a:p>
             <a:fld id="{0BC76379-3D6E-40BA-A44C-3D5E7FAE47E0}" type="datetimeFigureOut">
               <a:rPr lang="hu-HU" smtClean="0"/>
-              <a:t>2026. 09. 11.</a:t>
+              <a:t>2026. 09. 15.</a:t>
             </a:fld>
             <a:endParaRPr lang="hu-HU"/>
           </a:p>
@@ -458,7 +460,7 @@
           <a:p>
             <a:fld id="{0BC76379-3D6E-40BA-A44C-3D5E7FAE47E0}" type="datetimeFigureOut">
               <a:rPr lang="hu-HU" smtClean="0"/>
-              <a:t>2026. 09. 11.</a:t>
+              <a:t>2026. 09. 15.</a:t>
             </a:fld>
             <a:endParaRPr lang="hu-HU"/>
           </a:p>
@@ -666,7 +668,7 @@
           <a:p>
             <a:fld id="{0BC76379-3D6E-40BA-A44C-3D5E7FAE47E0}" type="datetimeFigureOut">
               <a:rPr lang="hu-HU" smtClean="0"/>
-              <a:t>2026. 09. 11.</a:t>
+              <a:t>2026. 09. 15.</a:t>
             </a:fld>
             <a:endParaRPr lang="hu-HU"/>
           </a:p>
@@ -864,7 +866,7 @@
           <a:p>
             <a:fld id="{0BC76379-3D6E-40BA-A44C-3D5E7FAE47E0}" type="datetimeFigureOut">
               <a:rPr lang="hu-HU" smtClean="0"/>
-              <a:t>2026. 09. 11.</a:t>
+              <a:t>2026. 09. 15.</a:t>
             </a:fld>
             <a:endParaRPr lang="hu-HU"/>
           </a:p>
@@ -1139,7 +1141,7 @@
           <a:p>
             <a:fld id="{0BC76379-3D6E-40BA-A44C-3D5E7FAE47E0}" type="datetimeFigureOut">
               <a:rPr lang="hu-HU" smtClean="0"/>
-              <a:t>2026. 09. 11.</a:t>
+              <a:t>2026. 09. 15.</a:t>
             </a:fld>
             <a:endParaRPr lang="hu-HU"/>
           </a:p>
@@ -1404,7 +1406,7 @@
           <a:p>
             <a:fld id="{0BC76379-3D6E-40BA-A44C-3D5E7FAE47E0}" type="datetimeFigureOut">
               <a:rPr lang="hu-HU" smtClean="0"/>
-              <a:t>2026. 09. 11.</a:t>
+              <a:t>2026. 09. 15.</a:t>
             </a:fld>
             <a:endParaRPr lang="hu-HU"/>
           </a:p>
@@ -1816,7 +1818,7 @@
           <a:p>
             <a:fld id="{0BC76379-3D6E-40BA-A44C-3D5E7FAE47E0}" type="datetimeFigureOut">
               <a:rPr lang="hu-HU" smtClean="0"/>
-              <a:t>2026. 09. 11.</a:t>
+              <a:t>2026. 09. 15.</a:t>
             </a:fld>
             <a:endParaRPr lang="hu-HU"/>
           </a:p>
@@ -1957,7 +1959,7 @@
           <a:p>
             <a:fld id="{0BC76379-3D6E-40BA-A44C-3D5E7FAE47E0}" type="datetimeFigureOut">
               <a:rPr lang="hu-HU" smtClean="0"/>
-              <a:t>2026. 09. 11.</a:t>
+              <a:t>2026. 09. 15.</a:t>
             </a:fld>
             <a:endParaRPr lang="hu-HU"/>
           </a:p>
@@ -2070,7 +2072,7 @@
           <a:p>
             <a:fld id="{0BC76379-3D6E-40BA-A44C-3D5E7FAE47E0}" type="datetimeFigureOut">
               <a:rPr lang="hu-HU" smtClean="0"/>
-              <a:t>2026. 09. 11.</a:t>
+              <a:t>2026. 09. 15.</a:t>
             </a:fld>
             <a:endParaRPr lang="hu-HU"/>
           </a:p>
@@ -2381,7 +2383,7 @@
           <a:p>
             <a:fld id="{0BC76379-3D6E-40BA-A44C-3D5E7FAE47E0}" type="datetimeFigureOut">
               <a:rPr lang="hu-HU" smtClean="0"/>
-              <a:t>2026. 09. 11.</a:t>
+              <a:t>2026. 09. 15.</a:t>
             </a:fld>
             <a:endParaRPr lang="hu-HU"/>
           </a:p>
@@ -2669,7 +2671,7 @@
           <a:p>
             <a:fld id="{0BC76379-3D6E-40BA-A44C-3D5E7FAE47E0}" type="datetimeFigureOut">
               <a:rPr lang="hu-HU" smtClean="0"/>
-              <a:t>2026. 09. 11.</a:t>
+              <a:t>2026. 09. 15.</a:t>
             </a:fld>
             <a:endParaRPr lang="hu-HU"/>
           </a:p>
@@ -2940,7 +2942,7 @@
           <a:p>
             <a:fld id="{0BC76379-3D6E-40BA-A44C-3D5E7FAE47E0}" type="datetimeFigureOut">
               <a:rPr lang="hu-HU" smtClean="0"/>
-              <a:t>2026. 09. 11.</a:t>
+              <a:t>2026. 09. 15.</a:t>
             </a:fld>
             <a:endParaRPr lang="hu-HU"/>
           </a:p>
@@ -3463,8 +3465,8 @@
         </p:nvSpPr>
         <p:spPr>
           <a:xfrm>
-            <a:off x="1574277" y="1112363"/>
-            <a:ext cx="3770722" cy="1875934"/>
+            <a:off x="170758" y="711310"/>
+            <a:ext cx="3770722" cy="2208353"/>
           </a:xfrm>
           <a:prstGeom prst="roundRect">
             <a:avLst/>
@@ -3496,7 +3498,7 @@
                 </a:solidFill>
                 <a:latin typeface="Bahnschrift SemiBold SemiConden" panose="020B0502040204020203" pitchFamily="34" charset="0"/>
               </a:rPr>
-              <a:t>MEGYE ADATAI</a:t>
+              <a:t>ADATBETÖLTÉS</a:t>
             </a:r>
           </a:p>
         </p:txBody>
@@ -3515,8 +3517,8 @@
         </p:nvSpPr>
         <p:spPr>
           <a:xfrm>
-            <a:off x="7213077" y="1112363"/>
-            <a:ext cx="3770722" cy="1875934"/>
+            <a:off x="4210639" y="711310"/>
+            <a:ext cx="3770722" cy="2208353"/>
           </a:xfrm>
           <a:prstGeom prst="roundRect">
             <a:avLst/>
@@ -3548,7 +3550,7 @@
                 </a:solidFill>
                 <a:latin typeface="Bahnschrift SemiBold SemiConden" panose="020B0502040204020203" pitchFamily="34" charset="0"/>
               </a:rPr>
-              <a:t>TELEPÜLÉS TÍPUSAI</a:t>
+              <a:t>MEGYE ADATAI</a:t>
             </a:r>
           </a:p>
         </p:txBody>
@@ -3567,8 +3569,8 @@
         </p:nvSpPr>
         <p:spPr>
           <a:xfrm>
-            <a:off x="1574277" y="4121084"/>
-            <a:ext cx="3770722" cy="1875934"/>
+            <a:off x="8250520" y="711310"/>
+            <a:ext cx="3770722" cy="2208353"/>
           </a:xfrm>
           <a:prstGeom prst="roundRect">
             <a:avLst/>
@@ -3600,7 +3602,7 @@
                 </a:solidFill>
                 <a:latin typeface="Bahnschrift SemiBold SemiConden" panose="020B0502040204020203" pitchFamily="34" charset="0"/>
               </a:rPr>
-              <a:t>-----</a:t>
+              <a:t>TELEPÜLÉS TÍPUSAI</a:t>
             </a:r>
           </a:p>
         </p:txBody>
@@ -3619,8 +3621,112 @@
         </p:nvSpPr>
         <p:spPr>
           <a:xfrm>
-            <a:off x="7213077" y="4121084"/>
-            <a:ext cx="3770722" cy="1875934"/>
+            <a:off x="4210639" y="3684723"/>
+            <a:ext cx="3770722" cy="2208353"/>
+          </a:xfrm>
+          <a:prstGeom prst="roundRect">
+            <a:avLst/>
+          </a:prstGeom>
+        </p:spPr>
+        <p:style>
+          <a:lnRef idx="1">
+            <a:schemeClr val="accent5"/>
+          </a:lnRef>
+          <a:fillRef idx="2">
+            <a:schemeClr val="accent5"/>
+          </a:fillRef>
+          <a:effectRef idx="1">
+            <a:schemeClr val="accent5"/>
+          </a:effectRef>
+          <a:fontRef idx="minor">
+            <a:schemeClr val="dk1"/>
+          </a:fontRef>
+        </p:style>
+        <p:txBody>
+          <a:bodyPr rtlCol="0" anchor="ctr"/>
+          <a:lstStyle/>
+          <a:p>
+            <a:pPr algn="ctr"/>
+            <a:r>
+              <a:rPr lang="hu-HU" sz="2800" dirty="0">
+                <a:solidFill>
+                  <a:schemeClr val="bg1"/>
+                </a:solidFill>
+                <a:latin typeface="Bahnschrift SemiBold SemiConden" panose="020B0502040204020203" pitchFamily="34" charset="0"/>
+              </a:rPr>
+              <a:t>HIBAKEZELÉS</a:t>
+            </a:r>
+          </a:p>
+        </p:txBody>
+      </p:sp>
+      <p:sp>
+        <p:nvSpPr>
+          <p:cNvPr id="6" name="Téglalap: lekerekített 5">
+            <a:extLst>
+              <a:ext uri="{FF2B5EF4-FFF2-40B4-BE49-F238E27FC236}">
+                <a16:creationId xmlns:a16="http://schemas.microsoft.com/office/drawing/2014/main" id="{0DD73532-CF41-46FA-BBC2-B79756194F3B}"/>
+              </a:ext>
+            </a:extLst>
+          </p:cNvPr>
+          <p:cNvSpPr/>
+          <p:nvPr/>
+        </p:nvSpPr>
+        <p:spPr>
+          <a:xfrm>
+            <a:off x="170758" y="3687286"/>
+            <a:ext cx="3770722" cy="2208353"/>
+          </a:xfrm>
+          <a:prstGeom prst="roundRect">
+            <a:avLst/>
+          </a:prstGeom>
+        </p:spPr>
+        <p:style>
+          <a:lnRef idx="1">
+            <a:schemeClr val="accent5"/>
+          </a:lnRef>
+          <a:fillRef idx="2">
+            <a:schemeClr val="accent5"/>
+          </a:fillRef>
+          <a:effectRef idx="1">
+            <a:schemeClr val="accent5"/>
+          </a:effectRef>
+          <a:fontRef idx="minor">
+            <a:schemeClr val="dk1"/>
+          </a:fontRef>
+        </p:style>
+        <p:txBody>
+          <a:bodyPr rtlCol="0" anchor="ctr"/>
+          <a:lstStyle/>
+          <a:p>
+            <a:pPr algn="ctr"/>
+            <a:r>
+              <a:rPr lang="hu-HU" sz="2800" dirty="0">
+                <a:solidFill>
+                  <a:schemeClr val="bg1"/>
+                </a:solidFill>
+                <a:latin typeface="Bahnschrift SemiBold SemiConden" panose="020B0502040204020203" pitchFamily="34" charset="0"/>
+              </a:rPr>
+              <a:t>LAPOZÓS LISTÁZÁS</a:t>
+            </a:r>
+          </a:p>
+        </p:txBody>
+      </p:sp>
+      <p:sp>
+        <p:nvSpPr>
+          <p:cNvPr id="10" name="Téglalap: lekerekített 9">
+            <a:extLst>
+              <a:ext uri="{FF2B5EF4-FFF2-40B4-BE49-F238E27FC236}">
+                <a16:creationId xmlns:a16="http://schemas.microsoft.com/office/drawing/2014/main" id="{247A1994-0C1A-4646-810E-C1E1B3A7D880}"/>
+              </a:ext>
+            </a:extLst>
+          </p:cNvPr>
+          <p:cNvSpPr/>
+          <p:nvPr/>
+        </p:nvSpPr>
+        <p:spPr>
+          <a:xfrm>
+            <a:off x="8250520" y="3684723"/>
+            <a:ext cx="3770722" cy="2208353"/>
           </a:xfrm>
           <a:prstGeom prst="roundRect">
             <a:avLst/>
@@ -3692,7 +3798,7 @@
           <p:cNvPr id="2" name="Cím 1">
             <a:extLst>
               <a:ext uri="{FF2B5EF4-FFF2-40B4-BE49-F238E27FC236}">
-                <a16:creationId xmlns:a16="http://schemas.microsoft.com/office/drawing/2014/main" id="{6327ABBB-95C2-4FA4-820B-B26647BAD853}"/>
+                <a16:creationId xmlns:a16="http://schemas.microsoft.com/office/drawing/2014/main" id="{159AA1C2-B8E8-4E71-ADB3-C402CABBE3B9}"/>
               </a:ext>
             </a:extLst>
           </p:cNvPr>
@@ -3705,45 +3811,82 @@
         </p:nvSpPr>
         <p:spPr/>
         <p:txBody>
+          <a:bodyPr>
+            <a:normAutofit/>
+          </a:bodyPr>
+          <a:lstStyle/>
+          <a:p>
+            <a:r>
+              <a:rPr lang="hu-HU" sz="4800" dirty="0">
+                <a:solidFill>
+                  <a:schemeClr val="accent1">
+                    <a:lumMod val="75000"/>
+                  </a:schemeClr>
+                </a:solidFill>
+                <a:latin typeface="Bahnschrift SemiBold SemiConden" panose="020B0502040204020203" pitchFamily="34" charset="0"/>
+                <a:ea typeface="+mn-ea"/>
+                <a:cs typeface="+mn-cs"/>
+              </a:rPr>
+              <a:t>ADATBETÖLTÉS ÉS SZERKEZET</a:t>
+            </a:r>
+          </a:p>
+        </p:txBody>
+      </p:sp>
+      <p:sp>
+        <p:nvSpPr>
+          <p:cNvPr id="3" name="Tartalom helye 2">
+            <a:extLst>
+              <a:ext uri="{FF2B5EF4-FFF2-40B4-BE49-F238E27FC236}">
+                <a16:creationId xmlns:a16="http://schemas.microsoft.com/office/drawing/2014/main" id="{09BA9446-C7E2-4616-ABD1-DD036E3BC01B}"/>
+              </a:ext>
+            </a:extLst>
+          </p:cNvPr>
+          <p:cNvSpPr>
+            <a:spLocks noGrp="1"/>
+          </p:cNvSpPr>
+          <p:nvPr>
+            <p:ph idx="1"/>
+          </p:nvPr>
+        </p:nvSpPr>
+        <p:spPr/>
+        <p:txBody>
           <a:bodyPr/>
           <a:lstStyle/>
           <a:p>
             <a:r>
               <a:rPr lang="hu-HU" dirty="0"/>
-              <a:t>Megye</a:t>
-            </a:r>
-          </a:p>
-        </p:txBody>
-      </p:sp>
-      <p:sp>
-        <p:nvSpPr>
-          <p:cNvPr id="3" name="Tartalom helye 2">
-            <a:extLst>
-              <a:ext uri="{FF2B5EF4-FFF2-40B4-BE49-F238E27FC236}">
-                <a16:creationId xmlns:a16="http://schemas.microsoft.com/office/drawing/2014/main" id="{21DEA9EE-58BE-48A3-8261-650B6B776DB2}"/>
-              </a:ext>
-            </a:extLst>
-          </p:cNvPr>
-          <p:cNvSpPr>
-            <a:spLocks noGrp="1"/>
-          </p:cNvSpPr>
-          <p:nvPr>
-            <p:ph idx="1"/>
-          </p:nvPr>
-        </p:nvSpPr>
-        <p:spPr/>
-        <p:txBody>
-          <a:bodyPr/>
-          <a:lstStyle/>
-          <a:p>
-            <a:endParaRPr lang="hu-HU"/>
+              <a:t>Pontosvesszős Elválasztás</a:t>
+            </a:r>
+          </a:p>
+          <a:p>
+            <a:r>
+              <a:rPr lang="hu-HU" dirty="0"/>
+              <a:t>Kiszámítja  az </a:t>
+            </a:r>
+            <a:r>
+              <a:rPr lang="hu-HU" dirty="0" err="1"/>
+              <a:t>össz</a:t>
+            </a:r>
+            <a:r>
+              <a:rPr lang="hu-HU" dirty="0"/>
+              <a:t> értéket </a:t>
+            </a:r>
+          </a:p>
+          <a:p>
+            <a:pPr marL="0" indent="0">
+              <a:buNone/>
+            </a:pPr>
+            <a:r>
+              <a:rPr lang="hu-HU" dirty="0"/>
+              <a:t>   (férfi + női lakosság)</a:t>
+            </a:r>
           </a:p>
         </p:txBody>
       </p:sp>
     </p:spTree>
     <p:extLst>
       <p:ext uri="{BB962C8B-B14F-4D97-AF65-F5344CB8AC3E}">
-        <p14:creationId xmlns:p14="http://schemas.microsoft.com/office/powerpoint/2010/main" val="1841956468"/>
+        <p14:creationId xmlns:p14="http://schemas.microsoft.com/office/powerpoint/2010/main" val="1615445492"/>
       </p:ext>
     </p:extLst>
   </p:cSld>
@@ -3775,7 +3918,7 @@
           <p:cNvPr id="2" name="Cím 1">
             <a:extLst>
               <a:ext uri="{FF2B5EF4-FFF2-40B4-BE49-F238E27FC236}">
-                <a16:creationId xmlns:a16="http://schemas.microsoft.com/office/drawing/2014/main" id="{B55CE2C3-ABA1-405C-B6C5-4F9F54DBD089}"/>
+                <a16:creationId xmlns:a16="http://schemas.microsoft.com/office/drawing/2014/main" id="{38E4DC2C-CE43-4AFF-90E7-099C8933C41B}"/>
               </a:ext>
             </a:extLst>
           </p:cNvPr>
@@ -3792,438 +3935,47 @@
           <a:lstStyle/>
           <a:p>
             <a:r>
-              <a:rPr lang="hu-HU" dirty="0"/>
-              <a:t>Település</a:t>
-            </a:r>
-          </a:p>
-        </p:txBody>
-      </p:sp>
-      <p:sp>
-        <p:nvSpPr>
-          <p:cNvPr id="3" name="Tartalom helye 2">
-            <a:extLst>
-              <a:ext uri="{FF2B5EF4-FFF2-40B4-BE49-F238E27FC236}">
-                <a16:creationId xmlns:a16="http://schemas.microsoft.com/office/drawing/2014/main" id="{9E41338A-6C7B-4F93-AD20-0C4E8FAE4327}"/>
-              </a:ext>
-            </a:extLst>
-          </p:cNvPr>
-          <p:cNvSpPr>
-            <a:spLocks noGrp="1"/>
-          </p:cNvSpPr>
-          <p:nvPr>
-            <p:ph idx="1"/>
-          </p:nvPr>
-        </p:nvSpPr>
-        <p:spPr/>
-        <p:txBody>
-          <a:bodyPr/>
-          <a:lstStyle/>
-          <a:p>
-            <a:endParaRPr lang="hu-HU"/>
-          </a:p>
-        </p:txBody>
-      </p:sp>
-      <p:sp>
-        <p:nvSpPr>
-          <p:cNvPr id="4" name="Téglalap: lekerekített 3">
-            <a:extLst>
-              <a:ext uri="{FF2B5EF4-FFF2-40B4-BE49-F238E27FC236}">
-                <a16:creationId xmlns:a16="http://schemas.microsoft.com/office/drawing/2014/main" id="{388A6172-749E-420E-B4B9-3EAE95819CC3}"/>
-              </a:ext>
-            </a:extLst>
-          </p:cNvPr>
-          <p:cNvSpPr/>
-          <p:nvPr/>
-        </p:nvSpPr>
-        <p:spPr>
-          <a:xfrm>
-            <a:off x="1065229" y="3063327"/>
-            <a:ext cx="3770722" cy="1875934"/>
-          </a:xfrm>
-          <a:prstGeom prst="roundRect">
-            <a:avLst/>
-          </a:prstGeom>
-        </p:spPr>
-        <p:style>
-          <a:lnRef idx="1">
-            <a:schemeClr val="accent5"/>
-          </a:lnRef>
-          <a:fillRef idx="2">
-            <a:schemeClr val="accent5"/>
-          </a:fillRef>
-          <a:effectRef idx="1">
-            <a:schemeClr val="accent5"/>
-          </a:effectRef>
-          <a:fontRef idx="minor">
-            <a:schemeClr val="dk1"/>
-          </a:fontRef>
-        </p:style>
-        <p:txBody>
-          <a:bodyPr rtlCol="0" anchor="ctr"/>
-          <a:lstStyle/>
-          <a:p>
-            <a:pPr algn="ctr"/>
-            <a:r>
-              <a:rPr lang="hu-HU" sz="2800" dirty="0" err="1">
+              <a:rPr lang="hu-HU" sz="4400">
                 <a:solidFill>
                   <a:schemeClr val="bg1"/>
                 </a:solidFill>
                 <a:latin typeface="Bahnschrift SemiBold SemiConden" panose="020B0502040204020203" pitchFamily="34" charset="0"/>
               </a:rPr>
-              <a:t>Vá</a:t>
-            </a:r>
-            <a:endParaRPr lang="hu-HU" sz="2800" dirty="0">
-              <a:solidFill>
-                <a:schemeClr val="bg1"/>
-              </a:solidFill>
-              <a:latin typeface="Bahnschrift SemiBold SemiConden" panose="020B0502040204020203" pitchFamily="34" charset="0"/>
-            </a:endParaRPr>
-          </a:p>
-        </p:txBody>
-      </p:sp>
-      <p:sp>
-        <p:nvSpPr>
-          <p:cNvPr id="5" name="Téglalap: lekerekített 4">
-            <a:extLst>
-              <a:ext uri="{FF2B5EF4-FFF2-40B4-BE49-F238E27FC236}">
-                <a16:creationId xmlns:a16="http://schemas.microsoft.com/office/drawing/2014/main" id="{47C2A720-EFE5-4D81-8BB8-07D3A7CB320F}"/>
-              </a:ext>
-            </a:extLst>
-          </p:cNvPr>
-          <p:cNvSpPr/>
-          <p:nvPr/>
-        </p:nvSpPr>
-        <p:spPr>
-          <a:xfrm>
-            <a:off x="7136091" y="3063327"/>
-            <a:ext cx="3770722" cy="1875934"/>
-          </a:xfrm>
-          <a:prstGeom prst="roundRect">
-            <a:avLst/>
-          </a:prstGeom>
-        </p:spPr>
-        <p:style>
-          <a:lnRef idx="1">
-            <a:schemeClr val="accent5"/>
-          </a:lnRef>
-          <a:fillRef idx="2">
-            <a:schemeClr val="accent5"/>
-          </a:fillRef>
-          <a:effectRef idx="1">
-            <a:schemeClr val="accent5"/>
-          </a:effectRef>
-          <a:fontRef idx="minor">
-            <a:schemeClr val="dk1"/>
-          </a:fontRef>
-        </p:style>
-        <p:txBody>
-          <a:bodyPr rtlCol="0" anchor="ctr"/>
-          <a:lstStyle/>
-          <a:p>
-            <a:pPr algn="ctr"/>
-            <a:r>
-              <a:rPr lang="hu-HU" sz="2800" dirty="0">
-                <a:solidFill>
-                  <a:schemeClr val="bg1"/>
-                </a:solidFill>
-                <a:latin typeface="Bahnschrift SemiBold SemiConden" panose="020B0502040204020203" pitchFamily="34" charset="0"/>
-              </a:rPr>
-              <a:t>-----</a:t>
-            </a:r>
+              <a:t>MEGYE ADATAI</a:t>
+            </a:r>
+            <a:endParaRPr lang="hu-HU"/>
+          </a:p>
+        </p:txBody>
+      </p:sp>
+      <p:sp>
+        <p:nvSpPr>
+          <p:cNvPr id="3" name="Tartalom helye 2">
+            <a:extLst>
+              <a:ext uri="{FF2B5EF4-FFF2-40B4-BE49-F238E27FC236}">
+                <a16:creationId xmlns:a16="http://schemas.microsoft.com/office/drawing/2014/main" id="{A7D2C243-BB74-4DCD-889F-A858CD3E17BD}"/>
+              </a:ext>
+            </a:extLst>
+          </p:cNvPr>
+          <p:cNvSpPr>
+            <a:spLocks noGrp="1"/>
+          </p:cNvSpPr>
+          <p:nvPr>
+            <p:ph idx="1"/>
+          </p:nvPr>
+        </p:nvSpPr>
+        <p:spPr/>
+        <p:txBody>
+          <a:bodyPr/>
+          <a:lstStyle/>
+          <a:p>
+            <a:endParaRPr lang="hu-HU"/>
           </a:p>
         </p:txBody>
       </p:sp>
     </p:spTree>
     <p:extLst>
       <p:ext uri="{BB962C8B-B14F-4D97-AF65-F5344CB8AC3E}">
-        <p14:creationId xmlns:p14="http://schemas.microsoft.com/office/powerpoint/2010/main" val="939477866"/>
-      </p:ext>
-    </p:extLst>
-  </p:cSld>
-  <p:clrMapOvr>
-    <a:masterClrMapping/>
-  </p:clrMapOvr>
-</p:sld>
-</file>
-
-<file path=ppt/slides/slide5.xml><?xml version="1.0" encoding="utf-8"?>
-<p:sld xmlns:a="http://schemas.openxmlformats.org/drawingml/2006/main" xmlns:r="http://schemas.openxmlformats.org/officeDocument/2006/relationships" xmlns:p="http://schemas.openxmlformats.org/presentationml/2006/main">
-  <p:cSld>
-    <p:spTree>
-      <p:nvGrpSpPr>
-        <p:cNvPr id="1" name=""/>
-        <p:cNvGrpSpPr/>
-        <p:nvPr/>
-      </p:nvGrpSpPr>
-      <p:grpSpPr>
-        <a:xfrm>
-          <a:off x="0" y="0"/>
-          <a:ext cx="0" cy="0"/>
-          <a:chOff x="0" y="0"/>
-          <a:chExt cx="0" cy="0"/>
-        </a:xfrm>
-      </p:grpSpPr>
-      <p:sp>
-        <p:nvSpPr>
-          <p:cNvPr id="2" name="Cím 1">
-            <a:extLst>
-              <a:ext uri="{FF2B5EF4-FFF2-40B4-BE49-F238E27FC236}">
-                <a16:creationId xmlns:a16="http://schemas.microsoft.com/office/drawing/2014/main" id="{EA4C30F4-D41B-4252-A0A2-C219E0B46B73}"/>
-              </a:ext>
-            </a:extLst>
-          </p:cNvPr>
-          <p:cNvSpPr>
-            <a:spLocks noGrp="1"/>
-          </p:cNvSpPr>
-          <p:nvPr>
-            <p:ph type="title"/>
-          </p:nvPr>
-        </p:nvSpPr>
-        <p:spPr/>
-        <p:txBody>
-          <a:bodyPr/>
-          <a:lstStyle/>
-          <a:p>
-            <a:endParaRPr lang="hu-HU"/>
-          </a:p>
-        </p:txBody>
-      </p:sp>
-      <p:sp>
-        <p:nvSpPr>
-          <p:cNvPr id="3" name="Tartalom helye 2">
-            <a:extLst>
-              <a:ext uri="{FF2B5EF4-FFF2-40B4-BE49-F238E27FC236}">
-                <a16:creationId xmlns:a16="http://schemas.microsoft.com/office/drawing/2014/main" id="{A0903CCD-50E9-4859-ABC5-37C3BA232644}"/>
-              </a:ext>
-            </a:extLst>
-          </p:cNvPr>
-          <p:cNvSpPr>
-            <a:spLocks noGrp="1"/>
-          </p:cNvSpPr>
-          <p:nvPr>
-            <p:ph idx="1"/>
-          </p:nvPr>
-        </p:nvSpPr>
-        <p:spPr/>
-        <p:txBody>
-          <a:bodyPr/>
-          <a:lstStyle/>
-          <a:p>
-            <a:endParaRPr lang="hu-HU"/>
-          </a:p>
-        </p:txBody>
-      </p:sp>
-    </p:spTree>
-    <p:extLst>
-      <p:ext uri="{BB962C8B-B14F-4D97-AF65-F5344CB8AC3E}">
-        <p14:creationId xmlns:p14="http://schemas.microsoft.com/office/powerpoint/2010/main" val="93260527"/>
-      </p:ext>
-    </p:extLst>
-  </p:cSld>
-  <p:clrMapOvr>
-    <a:masterClrMapping/>
-  </p:clrMapOvr>
-</p:sld>
-</file>
-
-<file path=ppt/slides/slide6.xml><?xml version="1.0" encoding="utf-8"?>
-<p:sld xmlns:a="http://schemas.openxmlformats.org/drawingml/2006/main" xmlns:r="http://schemas.openxmlformats.org/officeDocument/2006/relationships" xmlns:p="http://schemas.openxmlformats.org/presentationml/2006/main">
-  <p:cSld>
-    <p:spTree>
-      <p:nvGrpSpPr>
-        <p:cNvPr id="1" name=""/>
-        <p:cNvGrpSpPr/>
-        <p:nvPr/>
-      </p:nvGrpSpPr>
-      <p:grpSpPr>
-        <a:xfrm>
-          <a:off x="0" y="0"/>
-          <a:ext cx="0" cy="0"/>
-          <a:chOff x="0" y="0"/>
-          <a:chExt cx="0" cy="0"/>
-        </a:xfrm>
-      </p:grpSpPr>
-      <p:sp>
-        <p:nvSpPr>
-          <p:cNvPr id="2" name="Cím 1">
-            <a:extLst>
-              <a:ext uri="{FF2B5EF4-FFF2-40B4-BE49-F238E27FC236}">
-                <a16:creationId xmlns:a16="http://schemas.microsoft.com/office/drawing/2014/main" id="{AF8F433F-34DD-4D30-B552-8A90B8C0D2C8}"/>
-              </a:ext>
-            </a:extLst>
-          </p:cNvPr>
-          <p:cNvSpPr>
-            <a:spLocks noGrp="1"/>
-          </p:cNvSpPr>
-          <p:nvPr>
-            <p:ph type="title"/>
-          </p:nvPr>
-        </p:nvSpPr>
-        <p:spPr/>
-        <p:txBody>
-          <a:bodyPr/>
-          <a:lstStyle/>
-          <a:p>
-            <a:endParaRPr lang="hu-HU"/>
-          </a:p>
-        </p:txBody>
-      </p:sp>
-      <p:sp>
-        <p:nvSpPr>
-          <p:cNvPr id="3" name="Tartalom helye 2">
-            <a:extLst>
-              <a:ext uri="{FF2B5EF4-FFF2-40B4-BE49-F238E27FC236}">
-                <a16:creationId xmlns:a16="http://schemas.microsoft.com/office/drawing/2014/main" id="{369FDBE2-5B71-4F0E-8C6E-EE309BA946C5}"/>
-              </a:ext>
-            </a:extLst>
-          </p:cNvPr>
-          <p:cNvSpPr>
-            <a:spLocks noGrp="1"/>
-          </p:cNvSpPr>
-          <p:nvPr>
-            <p:ph idx="1"/>
-          </p:nvPr>
-        </p:nvSpPr>
-        <p:spPr/>
-        <p:txBody>
-          <a:bodyPr/>
-          <a:lstStyle/>
-          <a:p>
-            <a:endParaRPr lang="hu-HU"/>
-          </a:p>
-        </p:txBody>
-      </p:sp>
-    </p:spTree>
-    <p:extLst>
-      <p:ext uri="{BB962C8B-B14F-4D97-AF65-F5344CB8AC3E}">
-        <p14:creationId xmlns:p14="http://schemas.microsoft.com/office/powerpoint/2010/main" val="3209786201"/>
-      </p:ext>
-    </p:extLst>
-  </p:cSld>
-  <p:clrMapOvr>
-    <a:masterClrMapping/>
-  </p:clrMapOvr>
-</p:sld>
-</file>
-
-<file path=ppt/slides/slide7.xml><?xml version="1.0" encoding="utf-8"?>
-<p:sld xmlns:a="http://schemas.openxmlformats.org/drawingml/2006/main" xmlns:r="http://schemas.openxmlformats.org/officeDocument/2006/relationships" xmlns:p="http://schemas.openxmlformats.org/presentationml/2006/main">
-  <p:cSld>
-    <p:spTree>
-      <p:nvGrpSpPr>
-        <p:cNvPr id="1" name=""/>
-        <p:cNvGrpSpPr/>
-        <p:nvPr/>
-      </p:nvGrpSpPr>
-      <p:grpSpPr>
-        <a:xfrm>
-          <a:off x="0" y="0"/>
-          <a:ext cx="0" cy="0"/>
-          <a:chOff x="0" y="0"/>
-          <a:chExt cx="0" cy="0"/>
-        </a:xfrm>
-      </p:grpSpPr>
-      <p:sp>
-        <p:nvSpPr>
-          <p:cNvPr id="2" name="Cím 1">
-            <a:extLst>
-              <a:ext uri="{FF2B5EF4-FFF2-40B4-BE49-F238E27FC236}">
-                <a16:creationId xmlns:a16="http://schemas.microsoft.com/office/drawing/2014/main" id="{7A0FC178-0F01-4F44-9923-6770641C7D2A}"/>
-              </a:ext>
-            </a:extLst>
-          </p:cNvPr>
-          <p:cNvSpPr>
-            <a:spLocks noGrp="1"/>
-          </p:cNvSpPr>
-          <p:nvPr>
-            <p:ph type="title"/>
-          </p:nvPr>
-        </p:nvSpPr>
-        <p:spPr/>
-        <p:txBody>
-          <a:bodyPr/>
-          <a:lstStyle/>
-          <a:p>
-            <a:endParaRPr lang="hu-HU"/>
-          </a:p>
-        </p:txBody>
-      </p:sp>
-      <p:sp>
-        <p:nvSpPr>
-          <p:cNvPr id="3" name="Tartalom helye 2">
-            <a:extLst>
-              <a:ext uri="{FF2B5EF4-FFF2-40B4-BE49-F238E27FC236}">
-                <a16:creationId xmlns:a16="http://schemas.microsoft.com/office/drawing/2014/main" id="{53C9C75B-F398-494C-8F27-3BCA261CAEA7}"/>
-              </a:ext>
-            </a:extLst>
-          </p:cNvPr>
-          <p:cNvSpPr>
-            <a:spLocks noGrp="1"/>
-          </p:cNvSpPr>
-          <p:nvPr>
-            <p:ph idx="1"/>
-          </p:nvPr>
-        </p:nvSpPr>
-        <p:spPr/>
-        <p:txBody>
-          <a:bodyPr/>
-          <a:lstStyle/>
-          <a:p>
-            <a:endParaRPr lang="hu-HU"/>
-          </a:p>
-        </p:txBody>
-      </p:sp>
-      <p:pic>
-        <p:nvPicPr>
-          <p:cNvPr id="2050" name="Picture 2" descr="Kihalófélben a magyar nép? Vészterhes jövőképet mutattak az ország  lakosságáról">
-            <a:extLst>
-              <a:ext uri="{FF2B5EF4-FFF2-40B4-BE49-F238E27FC236}">
-                <a16:creationId xmlns:a16="http://schemas.microsoft.com/office/drawing/2014/main" id="{71AB665D-6C67-40FC-BEA4-4FD5E27743EF}"/>
-              </a:ext>
-            </a:extLst>
-          </p:cNvPr>
-          <p:cNvPicPr>
-            <a:picLocks noChangeAspect="1" noChangeArrowheads="1"/>
-          </p:cNvPicPr>
-          <p:nvPr/>
-        </p:nvPicPr>
-        <p:blipFill>
-          <a:blip r:embed="rId2">
-            <a:extLst>
-              <a:ext uri="{28A0092B-C50C-407E-A947-70E740481C1C}">
-                <a14:useLocalDpi xmlns:a14="http://schemas.microsoft.com/office/drawing/2010/main" val="0"/>
-              </a:ext>
-            </a:extLst>
-          </a:blip>
-          <a:srcRect/>
-          <a:stretch>
-            <a:fillRect/>
-          </a:stretch>
-        </p:blipFill>
-        <p:spPr bwMode="auto">
-          <a:xfrm>
-            <a:off x="999066" y="1690688"/>
-            <a:ext cx="9753600" cy="4429125"/>
-          </a:xfrm>
-          <a:prstGeom prst="rect">
-            <a:avLst/>
-          </a:prstGeom>
-          <a:noFill/>
-          <a:extLst>
-            <a:ext uri="{909E8E84-426E-40DD-AFC4-6F175D3DCCD1}">
-              <a14:hiddenFill xmlns:a14="http://schemas.microsoft.com/office/drawing/2010/main">
-                <a:solidFill>
-                  <a:srgbClr val="FFFFFF"/>
-                </a:solidFill>
-              </a14:hiddenFill>
-            </a:ext>
-          </a:extLst>
-        </p:spPr>
-      </p:pic>
-    </p:spTree>
-    <p:extLst>
-      <p:ext uri="{BB962C8B-B14F-4D97-AF65-F5344CB8AC3E}">
-        <p14:creationId xmlns:p14="http://schemas.microsoft.com/office/powerpoint/2010/main" val="2807900046"/>
+        <p14:creationId xmlns:p14="http://schemas.microsoft.com/office/powerpoint/2010/main" val="1373732303"/>
       </p:ext>
     </p:extLst>
   </p:cSld>

--- a/Népesség 2025.pptx
+++ b/Népesség 2025.pptx
@@ -8,7 +8,11 @@
     <p:sldId id="256" r:id="rId2"/>
     <p:sldId id="257" r:id="rId3"/>
     <p:sldId id="258" r:id="rId4"/>
-    <p:sldId id="259" r:id="rId5"/>
+    <p:sldId id="264" r:id="rId5"/>
+    <p:sldId id="259" r:id="rId6"/>
+    <p:sldId id="261" r:id="rId7"/>
+    <p:sldId id="262" r:id="rId8"/>
+    <p:sldId id="263" r:id="rId9"/>
   </p:sldIdLst>
   <p:sldSz cx="12192000" cy="6858000"/>
   <p:notesSz cx="6858000" cy="9144000"/>
@@ -262,7 +266,7 @@
           <a:p>
             <a:fld id="{0BC76379-3D6E-40BA-A44C-3D5E7FAE47E0}" type="datetimeFigureOut">
               <a:rPr lang="hu-HU" smtClean="0"/>
-              <a:t>2026. 09. 15.</a:t>
+              <a:t>2026. 09. 17.</a:t>
             </a:fld>
             <a:endParaRPr lang="hu-HU"/>
           </a:p>
@@ -460,7 +464,7 @@
           <a:p>
             <a:fld id="{0BC76379-3D6E-40BA-A44C-3D5E7FAE47E0}" type="datetimeFigureOut">
               <a:rPr lang="hu-HU" smtClean="0"/>
-              <a:t>2026. 09. 15.</a:t>
+              <a:t>2026. 09. 17.</a:t>
             </a:fld>
             <a:endParaRPr lang="hu-HU"/>
           </a:p>
@@ -668,7 +672,7 @@
           <a:p>
             <a:fld id="{0BC76379-3D6E-40BA-A44C-3D5E7FAE47E0}" type="datetimeFigureOut">
               <a:rPr lang="hu-HU" smtClean="0"/>
-              <a:t>2026. 09. 15.</a:t>
+              <a:t>2026. 09. 17.</a:t>
             </a:fld>
             <a:endParaRPr lang="hu-HU"/>
           </a:p>
@@ -866,7 +870,7 @@
           <a:p>
             <a:fld id="{0BC76379-3D6E-40BA-A44C-3D5E7FAE47E0}" type="datetimeFigureOut">
               <a:rPr lang="hu-HU" smtClean="0"/>
-              <a:t>2026. 09. 15.</a:t>
+              <a:t>2026. 09. 17.</a:t>
             </a:fld>
             <a:endParaRPr lang="hu-HU"/>
           </a:p>
@@ -1141,7 +1145,7 @@
           <a:p>
             <a:fld id="{0BC76379-3D6E-40BA-A44C-3D5E7FAE47E0}" type="datetimeFigureOut">
               <a:rPr lang="hu-HU" smtClean="0"/>
-              <a:t>2026. 09. 15.</a:t>
+              <a:t>2026. 09. 17.</a:t>
             </a:fld>
             <a:endParaRPr lang="hu-HU"/>
           </a:p>
@@ -1406,7 +1410,7 @@
           <a:p>
             <a:fld id="{0BC76379-3D6E-40BA-A44C-3D5E7FAE47E0}" type="datetimeFigureOut">
               <a:rPr lang="hu-HU" smtClean="0"/>
-              <a:t>2026. 09. 15.</a:t>
+              <a:t>2026. 09. 17.</a:t>
             </a:fld>
             <a:endParaRPr lang="hu-HU"/>
           </a:p>
@@ -1818,7 +1822,7 @@
           <a:p>
             <a:fld id="{0BC76379-3D6E-40BA-A44C-3D5E7FAE47E0}" type="datetimeFigureOut">
               <a:rPr lang="hu-HU" smtClean="0"/>
-              <a:t>2026. 09. 15.</a:t>
+              <a:t>2026. 09. 17.</a:t>
             </a:fld>
             <a:endParaRPr lang="hu-HU"/>
           </a:p>
@@ -1959,7 +1963,7 @@
           <a:p>
             <a:fld id="{0BC76379-3D6E-40BA-A44C-3D5E7FAE47E0}" type="datetimeFigureOut">
               <a:rPr lang="hu-HU" smtClean="0"/>
-              <a:t>2026. 09. 15.</a:t>
+              <a:t>2026. 09. 17.</a:t>
             </a:fld>
             <a:endParaRPr lang="hu-HU"/>
           </a:p>
@@ -2072,7 +2076,7 @@
           <a:p>
             <a:fld id="{0BC76379-3D6E-40BA-A44C-3D5E7FAE47E0}" type="datetimeFigureOut">
               <a:rPr lang="hu-HU" smtClean="0"/>
-              <a:t>2026. 09. 15.</a:t>
+              <a:t>2026. 09. 17.</a:t>
             </a:fld>
             <a:endParaRPr lang="hu-HU"/>
           </a:p>
@@ -2383,7 +2387,7 @@
           <a:p>
             <a:fld id="{0BC76379-3D6E-40BA-A44C-3D5E7FAE47E0}" type="datetimeFigureOut">
               <a:rPr lang="hu-HU" smtClean="0"/>
-              <a:t>2026. 09. 15.</a:t>
+              <a:t>2026. 09. 17.</a:t>
             </a:fld>
             <a:endParaRPr lang="hu-HU"/>
           </a:p>
@@ -2671,7 +2675,7 @@
           <a:p>
             <a:fld id="{0BC76379-3D6E-40BA-A44C-3D5E7FAE47E0}" type="datetimeFigureOut">
               <a:rPr lang="hu-HU" smtClean="0"/>
-              <a:t>2026. 09. 15.</a:t>
+              <a:t>2026. 09. 17.</a:t>
             </a:fld>
             <a:endParaRPr lang="hu-HU"/>
           </a:p>
@@ -2942,7 +2946,7 @@
           <a:p>
             <a:fld id="{0BC76379-3D6E-40BA-A44C-3D5E7FAE47E0}" type="datetimeFigureOut">
               <a:rPr lang="hu-HU" smtClean="0"/>
-              <a:t>2026. 09. 15.</a:t>
+              <a:t>2026. 09. 17.</a:t>
             </a:fld>
             <a:endParaRPr lang="hu-HU"/>
           </a:p>
@@ -3421,6 +3425,271 @@
           </a:p>
         </p:txBody>
       </p:sp>
+      <p:sp>
+        <p:nvSpPr>
+          <p:cNvPr id="11" name="Téglalap: lekerekített 5">
+            <a:hlinkClick r:id="rId2" action="ppaction://hlinksldjump"/>
+            <a:extLst>
+              <a:ext uri="{FF2B5EF4-FFF2-40B4-BE49-F238E27FC236}">
+                <a16:creationId xmlns:a16="http://schemas.microsoft.com/office/drawing/2014/main" id="{614AC246-E5B4-2D27-D699-A5F77E3600BC}"/>
+              </a:ext>
+            </a:extLst>
+          </p:cNvPr>
+          <p:cNvSpPr/>
+          <p:nvPr/>
+        </p:nvSpPr>
+        <p:spPr>
+          <a:xfrm>
+            <a:off x="1584693" y="7022570"/>
+            <a:ext cx="3770722" cy="2208353"/>
+          </a:xfrm>
+          <a:prstGeom prst="roundRect">
+            <a:avLst/>
+          </a:prstGeom>
+        </p:spPr>
+        <p:style>
+          <a:lnRef idx="1">
+            <a:schemeClr val="accent5"/>
+          </a:lnRef>
+          <a:fillRef idx="2">
+            <a:schemeClr val="accent5"/>
+          </a:fillRef>
+          <a:effectRef idx="1">
+            <a:schemeClr val="accent5"/>
+          </a:effectRef>
+          <a:fontRef idx="minor">
+            <a:schemeClr val="dk1"/>
+          </a:fontRef>
+        </p:style>
+        <p:txBody>
+          <a:bodyPr rtlCol="0" anchor="ctr"/>
+          <a:lstStyle/>
+          <a:p>
+            <a:pPr algn="ctr"/>
+            <a:r>
+              <a:rPr lang="hu-HU" sz="2800" dirty="0">
+                <a:solidFill>
+                  <a:schemeClr val="bg1"/>
+                </a:solidFill>
+                <a:latin typeface="Bahnschrift SemiBold SemiConden" panose="020B0502040204020203" pitchFamily="34" charset="0"/>
+              </a:rPr>
+              <a:t>LAPOZÁS</a:t>
+            </a:r>
+          </a:p>
+        </p:txBody>
+      </p:sp>
+      <p:sp>
+        <p:nvSpPr>
+          <p:cNvPr id="13" name="Téglalap: lekerekített 9">
+            <a:hlinkClick r:id="rId3" action="ppaction://hlinksldjump"/>
+            <a:extLst>
+              <a:ext uri="{FF2B5EF4-FFF2-40B4-BE49-F238E27FC236}">
+                <a16:creationId xmlns:a16="http://schemas.microsoft.com/office/drawing/2014/main" id="{5FAD1ED6-D100-D95A-D9A7-C2C2DE6E1F02}"/>
+              </a:ext>
+            </a:extLst>
+          </p:cNvPr>
+          <p:cNvSpPr/>
+          <p:nvPr/>
+        </p:nvSpPr>
+        <p:spPr>
+          <a:xfrm>
+            <a:off x="6210054" y="7022570"/>
+            <a:ext cx="3770722" cy="2208353"/>
+          </a:xfrm>
+          <a:prstGeom prst="roundRect">
+            <a:avLst/>
+          </a:prstGeom>
+        </p:spPr>
+        <p:style>
+          <a:lnRef idx="1">
+            <a:schemeClr val="accent5"/>
+          </a:lnRef>
+          <a:fillRef idx="2">
+            <a:schemeClr val="accent5"/>
+          </a:fillRef>
+          <a:effectRef idx="1">
+            <a:schemeClr val="accent5"/>
+          </a:effectRef>
+          <a:fontRef idx="minor">
+            <a:schemeClr val="dk1"/>
+          </a:fontRef>
+        </p:style>
+        <p:txBody>
+          <a:bodyPr rtlCol="0" anchor="ctr"/>
+          <a:lstStyle/>
+          <a:p>
+            <a:pPr algn="ctr"/>
+            <a:r>
+              <a:rPr lang="hu-HU" sz="2800" dirty="0">
+                <a:solidFill>
+                  <a:schemeClr val="bg1"/>
+                </a:solidFill>
+                <a:latin typeface="Bahnschrift SemiBold SemiConden" panose="020B0502040204020203" pitchFamily="34" charset="0"/>
+              </a:rPr>
+              <a:t>KILÉPÉS</a:t>
+            </a:r>
+          </a:p>
+        </p:txBody>
+      </p:sp>
+      <p:sp>
+        <p:nvSpPr>
+          <p:cNvPr id="15" name="Téglalap: lekerekített 4">
+            <a:hlinkClick r:id="rId4" action="ppaction://hlinksldjump"/>
+            <a:extLst>
+              <a:ext uri="{FF2B5EF4-FFF2-40B4-BE49-F238E27FC236}">
+                <a16:creationId xmlns:a16="http://schemas.microsoft.com/office/drawing/2014/main" id="{1D356477-5C56-A82A-DE6D-D94AAEE476BA}"/>
+              </a:ext>
+            </a:extLst>
+          </p:cNvPr>
+          <p:cNvSpPr/>
+          <p:nvPr/>
+        </p:nvSpPr>
+        <p:spPr>
+          <a:xfrm>
+            <a:off x="0" y="-2542450"/>
+            <a:ext cx="3770722" cy="2208353"/>
+          </a:xfrm>
+          <a:prstGeom prst="roundRect">
+            <a:avLst/>
+          </a:prstGeom>
+        </p:spPr>
+        <p:style>
+          <a:lnRef idx="1">
+            <a:schemeClr val="accent5"/>
+          </a:lnRef>
+          <a:fillRef idx="2">
+            <a:schemeClr val="accent5"/>
+          </a:fillRef>
+          <a:effectRef idx="1">
+            <a:schemeClr val="accent5"/>
+          </a:effectRef>
+          <a:fontRef idx="minor">
+            <a:schemeClr val="dk1"/>
+          </a:fontRef>
+        </p:style>
+        <p:txBody>
+          <a:bodyPr rtlCol="0" anchor="ctr"/>
+          <a:lstStyle/>
+          <a:p>
+            <a:pPr algn="ctr"/>
+            <a:r>
+              <a:rPr lang="hu-HU" sz="2800" dirty="0">
+                <a:solidFill>
+                  <a:schemeClr val="bg1"/>
+                </a:solidFill>
+                <a:latin typeface="Bahnschrift SemiBold SemiConden" panose="020B0502040204020203" pitchFamily="34" charset="0"/>
+              </a:rPr>
+              <a:t>ADATBETÖLTÉS</a:t>
+            </a:r>
+          </a:p>
+        </p:txBody>
+      </p:sp>
+      <p:sp>
+        <p:nvSpPr>
+          <p:cNvPr id="17" name="Téglalap: lekerekített 6">
+            <a:hlinkClick r:id="rId5" action="ppaction://hlinksldjump"/>
+            <a:extLst>
+              <a:ext uri="{FF2B5EF4-FFF2-40B4-BE49-F238E27FC236}">
+                <a16:creationId xmlns:a16="http://schemas.microsoft.com/office/drawing/2014/main" id="{AB3C9B66-6D2E-4800-1C53-5657E62747CA}"/>
+              </a:ext>
+            </a:extLst>
+          </p:cNvPr>
+          <p:cNvSpPr/>
+          <p:nvPr/>
+        </p:nvSpPr>
+        <p:spPr>
+          <a:xfrm>
+            <a:off x="4039881" y="-2542450"/>
+            <a:ext cx="3770722" cy="2208353"/>
+          </a:xfrm>
+          <a:prstGeom prst="roundRect">
+            <a:avLst/>
+          </a:prstGeom>
+        </p:spPr>
+        <p:style>
+          <a:lnRef idx="1">
+            <a:schemeClr val="accent5"/>
+          </a:lnRef>
+          <a:fillRef idx="2">
+            <a:schemeClr val="accent5"/>
+          </a:fillRef>
+          <a:effectRef idx="1">
+            <a:schemeClr val="accent5"/>
+          </a:effectRef>
+          <a:fontRef idx="minor">
+            <a:schemeClr val="dk1"/>
+          </a:fontRef>
+        </p:style>
+        <p:txBody>
+          <a:bodyPr rtlCol="0" anchor="ctr"/>
+          <a:lstStyle/>
+          <a:p>
+            <a:pPr algn="ctr"/>
+            <a:r>
+              <a:rPr lang="hu-HU" sz="2800" dirty="0">
+                <a:solidFill>
+                  <a:schemeClr val="bg1"/>
+                </a:solidFill>
+                <a:latin typeface="Bahnschrift SemiBold SemiConden" panose="020B0502040204020203" pitchFamily="34" charset="0"/>
+              </a:rPr>
+              <a:t>MEGYE ADATAI</a:t>
+            </a:r>
+          </a:p>
+        </p:txBody>
+      </p:sp>
+      <p:sp>
+        <p:nvSpPr>
+          <p:cNvPr id="19" name="Téglalap: lekerekített 7">
+            <a:hlinkClick r:id="rId6" action="ppaction://hlinksldjump"/>
+            <a:extLst>
+              <a:ext uri="{FF2B5EF4-FFF2-40B4-BE49-F238E27FC236}">
+                <a16:creationId xmlns:a16="http://schemas.microsoft.com/office/drawing/2014/main" id="{771AF31C-B33D-CF36-CD86-A44176593FED}"/>
+              </a:ext>
+            </a:extLst>
+          </p:cNvPr>
+          <p:cNvSpPr/>
+          <p:nvPr/>
+        </p:nvSpPr>
+        <p:spPr>
+          <a:xfrm>
+            <a:off x="8079762" y="-2542450"/>
+            <a:ext cx="3770722" cy="2208353"/>
+          </a:xfrm>
+          <a:prstGeom prst="roundRect">
+            <a:avLst/>
+          </a:prstGeom>
+        </p:spPr>
+        <p:style>
+          <a:lnRef idx="1">
+            <a:schemeClr val="accent5"/>
+          </a:lnRef>
+          <a:fillRef idx="2">
+            <a:schemeClr val="accent5"/>
+          </a:fillRef>
+          <a:effectRef idx="1">
+            <a:schemeClr val="accent5"/>
+          </a:effectRef>
+          <a:fontRef idx="minor">
+            <a:schemeClr val="dk1"/>
+          </a:fontRef>
+        </p:style>
+        <p:txBody>
+          <a:bodyPr rtlCol="0" anchor="ctr"/>
+          <a:lstStyle/>
+          <a:p>
+            <a:pPr algn="ctr"/>
+            <a:r>
+              <a:rPr lang="hu-HU" sz="2800" dirty="0">
+                <a:solidFill>
+                  <a:schemeClr val="bg1"/>
+                </a:solidFill>
+                <a:latin typeface="Bahnschrift SemiBold SemiConden" panose="020B0502040204020203" pitchFamily="34" charset="0"/>
+              </a:rPr>
+              <a:t>TELEPÜLÉS TÍPUSAI</a:t>
+            </a:r>
+          </a:p>
+        </p:txBody>
+      </p:sp>
     </p:spTree>
     <p:extLst>
       <p:ext uri="{BB962C8B-B14F-4D97-AF65-F5344CB8AC3E}">
@@ -3431,6 +3700,18 @@
   <p:clrMapOvr>
     <a:masterClrMapping/>
   </p:clrMapOvr>
+  <mc:AlternateContent xmlns:mc="http://schemas.openxmlformats.org/markup-compatibility/2006">
+    <mc:Choice xmlns:p159="http://schemas.microsoft.com/office/powerpoint/2015/09/main" Requires="p159">
+      <p:transition xmlns:p14="http://schemas.microsoft.com/office/powerpoint/2010/main" spd="slow" p14:dur="2000">
+        <p159:morph option="byObject"/>
+      </p:transition>
+    </mc:Choice>
+    <mc:Fallback>
+      <p:transition spd="slow">
+        <p:fade/>
+      </p:transition>
+    </mc:Fallback>
+  </mc:AlternateContent>
 </p:sld>
 </file>
 
@@ -3454,6 +3735,7 @@
       <p:sp>
         <p:nvSpPr>
           <p:cNvPr id="5" name="Téglalap: lekerekített 4">
+            <a:hlinkClick r:id="rId2" action="ppaction://hlinksldjump"/>
             <a:extLst>
               <a:ext uri="{FF2B5EF4-FFF2-40B4-BE49-F238E27FC236}">
                 <a16:creationId xmlns:a16="http://schemas.microsoft.com/office/drawing/2014/main" id="{9E8F3F3D-6BC9-4A25-8A0E-436E6ED49532}"/>
@@ -3465,7 +3747,7 @@
         </p:nvSpPr>
         <p:spPr>
           <a:xfrm>
-            <a:off x="170758" y="711310"/>
+            <a:off x="145358" y="1220647"/>
             <a:ext cx="3770722" cy="2208353"/>
           </a:xfrm>
           <a:prstGeom prst="roundRect">
@@ -3506,6 +3788,7 @@
       <p:sp>
         <p:nvSpPr>
           <p:cNvPr id="7" name="Téglalap: lekerekített 6">
+            <a:hlinkClick r:id="rId3" action="ppaction://hlinksldjump"/>
             <a:extLst>
               <a:ext uri="{FF2B5EF4-FFF2-40B4-BE49-F238E27FC236}">
                 <a16:creationId xmlns:a16="http://schemas.microsoft.com/office/drawing/2014/main" id="{93F3B3F4-DA24-4F16-BD48-28454BDE14A8}"/>
@@ -3517,7 +3800,7 @@
         </p:nvSpPr>
         <p:spPr>
           <a:xfrm>
-            <a:off x="4210639" y="711310"/>
+            <a:off x="4185239" y="1220647"/>
             <a:ext cx="3770722" cy="2208353"/>
           </a:xfrm>
           <a:prstGeom prst="roundRect">
@@ -3558,6 +3841,7 @@
       <p:sp>
         <p:nvSpPr>
           <p:cNvPr id="8" name="Téglalap: lekerekített 7">
+            <a:hlinkClick r:id="rId4" action="ppaction://hlinksldjump"/>
             <a:extLst>
               <a:ext uri="{FF2B5EF4-FFF2-40B4-BE49-F238E27FC236}">
                 <a16:creationId xmlns:a16="http://schemas.microsoft.com/office/drawing/2014/main" id="{FAC67B0C-4F5D-4B61-B993-533CB8C6D771}"/>
@@ -3569,7 +3853,7 @@
         </p:nvSpPr>
         <p:spPr>
           <a:xfrm>
-            <a:off x="8250520" y="711310"/>
+            <a:off x="8225120" y="1220647"/>
             <a:ext cx="3770722" cy="2208353"/>
           </a:xfrm>
           <a:prstGeom prst="roundRect">
@@ -3609,10 +3893,11 @@
       </p:sp>
       <p:sp>
         <p:nvSpPr>
-          <p:cNvPr id="9" name="Téglalap: lekerekített 8">
-            <a:extLst>
-              <a:ext uri="{FF2B5EF4-FFF2-40B4-BE49-F238E27FC236}">
-                <a16:creationId xmlns:a16="http://schemas.microsoft.com/office/drawing/2014/main" id="{DD610A53-CBF5-4F27-9B9E-DC13F38CE487}"/>
+          <p:cNvPr id="6" name="Téglalap: lekerekített 5">
+            <a:hlinkClick r:id="rId5" action="ppaction://hlinksldjump"/>
+            <a:extLst>
+              <a:ext uri="{FF2B5EF4-FFF2-40B4-BE49-F238E27FC236}">
+                <a16:creationId xmlns:a16="http://schemas.microsoft.com/office/drawing/2014/main" id="{0DD73532-CF41-46FA-BBC2-B79756194F3B}"/>
               </a:ext>
             </a:extLst>
           </p:cNvPr>
@@ -3621,7 +3906,7 @@
         </p:nvSpPr>
         <p:spPr>
           <a:xfrm>
-            <a:off x="4210639" y="3684723"/>
+            <a:off x="1847159" y="3837123"/>
             <a:ext cx="3770722" cy="2208353"/>
           </a:xfrm>
           <a:prstGeom prst="roundRect">
@@ -3654,17 +3939,18 @@
                 </a:solidFill>
                 <a:latin typeface="Bahnschrift SemiBold SemiConden" panose="020B0502040204020203" pitchFamily="34" charset="0"/>
               </a:rPr>
-              <a:t>HIBAKEZELÉS</a:t>
-            </a:r>
-          </a:p>
-        </p:txBody>
-      </p:sp>
-      <p:sp>
-        <p:nvSpPr>
-          <p:cNvPr id="6" name="Téglalap: lekerekített 5">
-            <a:extLst>
-              <a:ext uri="{FF2B5EF4-FFF2-40B4-BE49-F238E27FC236}">
-                <a16:creationId xmlns:a16="http://schemas.microsoft.com/office/drawing/2014/main" id="{0DD73532-CF41-46FA-BBC2-B79756194F3B}"/>
+              <a:t>LAPOZÁS</a:t>
+            </a:r>
+          </a:p>
+        </p:txBody>
+      </p:sp>
+      <p:sp>
+        <p:nvSpPr>
+          <p:cNvPr id="10" name="Téglalap: lekerekített 9">
+            <a:hlinkClick r:id="rId6" action="ppaction://hlinksldjump"/>
+            <a:extLst>
+              <a:ext uri="{FF2B5EF4-FFF2-40B4-BE49-F238E27FC236}">
+                <a16:creationId xmlns:a16="http://schemas.microsoft.com/office/drawing/2014/main" id="{247A1994-0C1A-4646-810E-C1E1B3A7D880}"/>
               </a:ext>
             </a:extLst>
           </p:cNvPr>
@@ -3673,7 +3959,7 @@
         </p:nvSpPr>
         <p:spPr>
           <a:xfrm>
-            <a:off x="170758" y="3687286"/>
+            <a:off x="6472520" y="3837123"/>
             <a:ext cx="3770722" cy="2208353"/>
           </a:xfrm>
           <a:prstGeom prst="roundRect">
@@ -3706,58 +3992,6 @@
                 </a:solidFill>
                 <a:latin typeface="Bahnschrift SemiBold SemiConden" panose="020B0502040204020203" pitchFamily="34" charset="0"/>
               </a:rPr>
-              <a:t>LAPOZÓS LISTÁZÁS</a:t>
-            </a:r>
-          </a:p>
-        </p:txBody>
-      </p:sp>
-      <p:sp>
-        <p:nvSpPr>
-          <p:cNvPr id="10" name="Téglalap: lekerekített 9">
-            <a:extLst>
-              <a:ext uri="{FF2B5EF4-FFF2-40B4-BE49-F238E27FC236}">
-                <a16:creationId xmlns:a16="http://schemas.microsoft.com/office/drawing/2014/main" id="{247A1994-0C1A-4646-810E-C1E1B3A7D880}"/>
-              </a:ext>
-            </a:extLst>
-          </p:cNvPr>
-          <p:cNvSpPr/>
-          <p:nvPr/>
-        </p:nvSpPr>
-        <p:spPr>
-          <a:xfrm>
-            <a:off x="8250520" y="3684723"/>
-            <a:ext cx="3770722" cy="2208353"/>
-          </a:xfrm>
-          <a:prstGeom prst="roundRect">
-            <a:avLst/>
-          </a:prstGeom>
-        </p:spPr>
-        <p:style>
-          <a:lnRef idx="1">
-            <a:schemeClr val="accent5"/>
-          </a:lnRef>
-          <a:fillRef idx="2">
-            <a:schemeClr val="accent5"/>
-          </a:fillRef>
-          <a:effectRef idx="1">
-            <a:schemeClr val="accent5"/>
-          </a:effectRef>
-          <a:fontRef idx="minor">
-            <a:schemeClr val="dk1"/>
-          </a:fontRef>
-        </p:style>
-        <p:txBody>
-          <a:bodyPr rtlCol="0" anchor="ctr"/>
-          <a:lstStyle/>
-          <a:p>
-            <a:pPr algn="ctr"/>
-            <a:r>
-              <a:rPr lang="hu-HU" sz="2800" dirty="0">
-                <a:solidFill>
-                  <a:schemeClr val="bg1"/>
-                </a:solidFill>
-                <a:latin typeface="Bahnschrift SemiBold SemiConden" panose="020B0502040204020203" pitchFamily="34" charset="0"/>
-              </a:rPr>
               <a:t>KILÉPÉS</a:t>
             </a:r>
           </a:p>
@@ -3773,6 +4007,18 @@
   <p:clrMapOvr>
     <a:masterClrMapping/>
   </p:clrMapOvr>
+  <mc:AlternateContent xmlns:mc="http://schemas.openxmlformats.org/markup-compatibility/2006">
+    <mc:Choice xmlns:p159="http://schemas.microsoft.com/office/powerpoint/2015/09/main" Requires="p159">
+      <p:transition xmlns:p14="http://schemas.microsoft.com/office/powerpoint/2010/main" spd="slow" p14:dur="2000">
+        <p159:morph option="byObject"/>
+      </p:transition>
+    </mc:Choice>
+    <mc:Fallback>
+      <p:transition spd="slow">
+        <p:fade/>
+      </p:transition>
+    </mc:Fallback>
+  </mc:AlternateContent>
 </p:sld>
 </file>
 
@@ -3848,37 +4094,218 @@
             <p:ph idx="1"/>
           </p:nvPr>
         </p:nvSpPr>
-        <p:spPr/>
-        <p:txBody>
-          <a:bodyPr/>
-          <a:lstStyle/>
-          <a:p>
-            <a:r>
-              <a:rPr lang="hu-HU" dirty="0"/>
-              <a:t>Pontosvesszős Elválasztás</a:t>
-            </a:r>
-          </a:p>
-          <a:p>
-            <a:r>
-              <a:rPr lang="hu-HU" dirty="0"/>
-              <a:t>Kiszámítja  az </a:t>
-            </a:r>
-            <a:r>
-              <a:rPr lang="hu-HU" dirty="0" err="1"/>
-              <a:t>össz</a:t>
-            </a:r>
-            <a:r>
-              <a:rPr lang="hu-HU" dirty="0"/>
-              <a:t> értéket </a:t>
+        <p:spPr>
+          <a:xfrm>
+            <a:off x="838200" y="1825625"/>
+            <a:ext cx="10515600" cy="4351338"/>
+          </a:xfrm>
+        </p:spPr>
+        <p:txBody>
+          <a:bodyPr>
+            <a:normAutofit/>
+          </a:bodyPr>
+          <a:lstStyle/>
+          <a:p>
+            <a:r>
+              <a:rPr lang="hu-HU" dirty="0">
+                <a:latin typeface="Bahnschrift SemiBold SemiConden" panose="020B0502040204020203" pitchFamily="34" charset="0"/>
+              </a:rPr>
+              <a:t>Minden sor split(‚;’)-el van elválasztva.</a:t>
+            </a:r>
+          </a:p>
+          <a:p>
+            <a:pPr lvl="0"/>
+            <a:r>
+              <a:rPr lang="hu-HU" b="1" dirty="0">
+                <a:latin typeface="Bahnschrift SemiBold SemiConden" panose="020B0502040204020203" pitchFamily="34" charset="0"/>
+              </a:rPr>
+              <a:t>Fájlnyitás:</a:t>
+            </a:r>
+            <a:r>
+              <a:rPr lang="hu-HU" dirty="0">
+                <a:latin typeface="Bahnschrift SemiBold SemiConden" panose="020B0502040204020203" pitchFamily="34" charset="0"/>
+              </a:rPr>
+              <a:t> with open(...) blokk használata utf-8 kódolással a magyar ékezetes karakterek miatt.</a:t>
+            </a:r>
+          </a:p>
+          <a:p>
+            <a:pPr lvl="0"/>
+            <a:r>
+              <a:rPr lang="hu-HU" b="1" dirty="0">
+                <a:latin typeface="Bahnschrift SemiBold SemiConden" panose="020B0502040204020203" pitchFamily="34" charset="0"/>
+              </a:rPr>
+              <a:t>Hibakezelés:</a:t>
+            </a:r>
+            <a:r>
+              <a:rPr lang="hu-HU" dirty="0">
+                <a:latin typeface="Bahnschrift SemiBold SemiConden" panose="020B0502040204020203" pitchFamily="34" charset="0"/>
+              </a:rPr>
+              <a:t> try-except FileNotFoundError blokk védi a programot az összeomlástól, ha hiányzik a CSV.</a:t>
+            </a:r>
+          </a:p>
+          <a:p>
+            <a:pPr lvl="0"/>
+            <a:r>
+              <a:rPr lang="hu-HU" dirty="0">
+                <a:latin typeface="Bahnschrift SemiBold SemiConden" panose="020B0502040204020203" pitchFamily="34" charset="0"/>
+              </a:rPr>
+              <a:t>A program a lakossag_2025.csv fájlt olvassa be UTF-8 kódolással. A fejlécsort kihagyja, majd soronként feldolgozza az adatokat pontosvessző mentén.</a:t>
+            </a:r>
+          </a:p>
+          <a:p>
+            <a:pPr lvl="0"/>
+            <a:r>
+              <a:rPr lang="hu-HU" dirty="0">
+                <a:latin typeface="Bahnschrift SemiBold SemiConden" panose="020B0502040204020203" pitchFamily="34" charset="0"/>
+              </a:rPr>
+              <a:t>Az összesen mező automatikusan számolódik: ferfi + no.</a:t>
             </a:r>
           </a:p>
           <a:p>
             <a:pPr marL="0" indent="0">
               <a:buNone/>
             </a:pPr>
-            <a:r>
-              <a:rPr lang="hu-HU" dirty="0"/>
-              <a:t>   (férfi + női lakosság)</a:t>
+            <a:endParaRPr lang="hu-HU" dirty="0">
+              <a:latin typeface="Bahnschrift SemiBold SemiConden" panose="020B0502040204020203" pitchFamily="34" charset="0"/>
+            </a:endParaRPr>
+          </a:p>
+          <a:p>
+            <a:pPr marL="0" indent="0">
+              <a:buNone/>
+            </a:pPr>
+            <a:endParaRPr lang="hu-HU" dirty="0"/>
+          </a:p>
+        </p:txBody>
+      </p:sp>
+      <p:sp>
+        <p:nvSpPr>
+          <p:cNvPr id="6" name="Arrow: Left 5">
+            <a:hlinkClick r:id="rId2" action="ppaction://hlinksldjump"/>
+            <a:extLst>
+              <a:ext uri="{FF2B5EF4-FFF2-40B4-BE49-F238E27FC236}">
+                <a16:creationId xmlns:a16="http://schemas.microsoft.com/office/drawing/2014/main" id="{05308904-3F64-2DC0-F8CF-68E8A17FD85C}"/>
+              </a:ext>
+            </a:extLst>
+          </p:cNvPr>
+          <p:cNvSpPr/>
+          <p:nvPr/>
+        </p:nvSpPr>
+        <p:spPr>
+          <a:xfrm>
+            <a:off x="241300" y="6176963"/>
+            <a:ext cx="850900" cy="414337"/>
+          </a:xfrm>
+          <a:prstGeom prst="leftArrow">
+            <a:avLst/>
+          </a:prstGeom>
+        </p:spPr>
+        <p:style>
+          <a:lnRef idx="2">
+            <a:schemeClr val="accent1">
+              <a:shade val="15000"/>
+            </a:schemeClr>
+          </a:lnRef>
+          <a:fillRef idx="1">
+            <a:schemeClr val="accent1"/>
+          </a:fillRef>
+          <a:effectRef idx="0">
+            <a:schemeClr val="accent1"/>
+          </a:effectRef>
+          <a:fontRef idx="minor">
+            <a:schemeClr val="lt1"/>
+          </a:fontRef>
+        </p:style>
+        <p:txBody>
+          <a:bodyPr rtlCol="0" anchor="ctr"/>
+          <a:lstStyle/>
+          <a:p>
+            <a:pPr algn="ctr"/>
+            <a:endParaRPr lang="hu-HU"/>
+          </a:p>
+        </p:txBody>
+      </p:sp>
+      <p:sp>
+        <p:nvSpPr>
+          <p:cNvPr id="10" name="Arrow: Left 9">
+            <a:hlinkClick r:id="rId3" action="ppaction://hlinksldjump"/>
+            <a:extLst>
+              <a:ext uri="{FF2B5EF4-FFF2-40B4-BE49-F238E27FC236}">
+                <a16:creationId xmlns:a16="http://schemas.microsoft.com/office/drawing/2014/main" id="{71051697-F066-AB6A-7B99-8C8B2EE4C92A}"/>
+              </a:ext>
+            </a:extLst>
+          </p:cNvPr>
+          <p:cNvSpPr/>
+          <p:nvPr/>
+        </p:nvSpPr>
+        <p:spPr>
+          <a:xfrm rot="10800000">
+            <a:off x="10928350" y="6176963"/>
+            <a:ext cx="850900" cy="414337"/>
+          </a:xfrm>
+          <a:prstGeom prst="leftArrow">
+            <a:avLst/>
+          </a:prstGeom>
+        </p:spPr>
+        <p:style>
+          <a:lnRef idx="2">
+            <a:schemeClr val="accent1">
+              <a:shade val="15000"/>
+            </a:schemeClr>
+          </a:lnRef>
+          <a:fillRef idx="1">
+            <a:schemeClr val="accent1"/>
+          </a:fillRef>
+          <a:effectRef idx="0">
+            <a:schemeClr val="accent1"/>
+          </a:effectRef>
+          <a:fontRef idx="minor">
+            <a:schemeClr val="lt1"/>
+          </a:fontRef>
+        </p:style>
+        <p:txBody>
+          <a:bodyPr rtlCol="0" anchor="ctr"/>
+          <a:lstStyle/>
+          <a:p>
+            <a:pPr algn="ctr"/>
+            <a:endParaRPr lang="hu-HU" dirty="0"/>
+          </a:p>
+        </p:txBody>
+      </p:sp>
+      <p:sp>
+        <p:nvSpPr>
+          <p:cNvPr id="11" name="TextBox 10">
+            <a:extLst>
+              <a:ext uri="{FF2B5EF4-FFF2-40B4-BE49-F238E27FC236}">
+                <a16:creationId xmlns:a16="http://schemas.microsoft.com/office/drawing/2014/main" id="{C6DBBB43-45EA-F5FD-A87E-915CE4B7A7BD}"/>
+              </a:ext>
+            </a:extLst>
+          </p:cNvPr>
+          <p:cNvSpPr txBox="1"/>
+          <p:nvPr/>
+        </p:nvSpPr>
+        <p:spPr>
+          <a:xfrm>
+            <a:off x="11101916" y="6214854"/>
+            <a:ext cx="1354667" cy="338554"/>
+          </a:xfrm>
+          <a:prstGeom prst="rect">
+            <a:avLst/>
+          </a:prstGeom>
+          <a:noFill/>
+        </p:spPr>
+        <p:txBody>
+          <a:bodyPr wrap="square" rtlCol="0">
+            <a:spAutoFit/>
+          </a:bodyPr>
+          <a:lstStyle/>
+          <a:p>
+            <a:r>
+              <a:rPr lang="hu-HU" sz="1600" dirty="0">
+                <a:solidFill>
+                  <a:schemeClr val="bg2"/>
+                </a:solidFill>
+              </a:rPr>
+              <a:t>KÉP</a:t>
             </a:r>
           </a:p>
         </p:txBody>
@@ -3913,6 +4340,146 @@
           <a:chExt cx="0" cy="0"/>
         </a:xfrm>
       </p:grpSpPr>
+      <p:pic>
+        <p:nvPicPr>
+          <p:cNvPr id="5" name="Picture 4">
+            <a:extLst>
+              <a:ext uri="{FF2B5EF4-FFF2-40B4-BE49-F238E27FC236}">
+                <a16:creationId xmlns:a16="http://schemas.microsoft.com/office/drawing/2014/main" id="{C871D8F3-C5C9-EC0E-DA12-95C77045B8AC}"/>
+              </a:ext>
+            </a:extLst>
+          </p:cNvPr>
+          <p:cNvPicPr>
+            <a:picLocks noChangeAspect="1"/>
+          </p:cNvPicPr>
+          <p:nvPr/>
+        </p:nvPicPr>
+        <p:blipFill>
+          <a:blip r:embed="rId2">
+            <a:extLst>
+              <a:ext uri="{28A0092B-C50C-407E-A947-70E740481C1C}">
+                <a14:useLocalDpi xmlns:a14="http://schemas.microsoft.com/office/drawing/2010/main" val="0"/>
+              </a:ext>
+            </a:extLst>
+          </a:blip>
+          <a:srcRect l="9136" t="9383" r="9015" b="9259"/>
+          <a:stretch>
+            <a:fillRect/>
+          </a:stretch>
+        </p:blipFill>
+        <p:spPr>
+          <a:xfrm>
+            <a:off x="3014133" y="351366"/>
+            <a:ext cx="5782733" cy="5579534"/>
+          </a:xfrm>
+          <a:prstGeom prst="roundRect">
+            <a:avLst>
+              <a:gd name="adj" fmla="val 4167"/>
+            </a:avLst>
+          </a:prstGeom>
+          <a:solidFill>
+            <a:srgbClr val="FFFFFF"/>
+          </a:solidFill>
+          <a:ln w="76200" cap="sq">
+            <a:solidFill>
+              <a:srgbClr val="292929"/>
+            </a:solidFill>
+            <a:miter lim="800000"/>
+          </a:ln>
+          <a:effectLst>
+            <a:reflection blurRad="12700" stA="28000" endPos="28000" dist="5000" dir="5400000" sy="-100000" algn="bl" rotWithShape="0"/>
+          </a:effectLst>
+          <a:scene3d>
+            <a:camera prst="orthographicFront"/>
+            <a:lightRig rig="threePt" dir="t">
+              <a:rot lat="0" lon="0" rev="2700000"/>
+            </a:lightRig>
+          </a:scene3d>
+          <a:sp3d>
+            <a:bevelT h="38100"/>
+            <a:contourClr>
+              <a:srgbClr val="C0C0C0"/>
+            </a:contourClr>
+          </a:sp3d>
+        </p:spPr>
+      </p:pic>
+      <p:sp>
+        <p:nvSpPr>
+          <p:cNvPr id="7" name="Arrow: Left 6">
+            <a:hlinkClick r:id="rId3" action="ppaction://hlinksldjump"/>
+            <a:extLst>
+              <a:ext uri="{FF2B5EF4-FFF2-40B4-BE49-F238E27FC236}">
+                <a16:creationId xmlns:a16="http://schemas.microsoft.com/office/drawing/2014/main" id="{B7AB8F14-4700-BE8A-42DC-7263F960C0A2}"/>
+              </a:ext>
+            </a:extLst>
+          </p:cNvPr>
+          <p:cNvSpPr/>
+          <p:nvPr/>
+        </p:nvSpPr>
+        <p:spPr>
+          <a:xfrm>
+            <a:off x="241300" y="6176963"/>
+            <a:ext cx="850900" cy="414337"/>
+          </a:xfrm>
+          <a:prstGeom prst="leftArrow">
+            <a:avLst/>
+          </a:prstGeom>
+        </p:spPr>
+        <p:style>
+          <a:lnRef idx="2">
+            <a:schemeClr val="accent1">
+              <a:shade val="15000"/>
+            </a:schemeClr>
+          </a:lnRef>
+          <a:fillRef idx="1">
+            <a:schemeClr val="accent1"/>
+          </a:fillRef>
+          <a:effectRef idx="0">
+            <a:schemeClr val="accent1"/>
+          </a:effectRef>
+          <a:fontRef idx="minor">
+            <a:schemeClr val="lt1"/>
+          </a:fontRef>
+        </p:style>
+        <p:txBody>
+          <a:bodyPr rtlCol="0" anchor="ctr"/>
+          <a:lstStyle/>
+          <a:p>
+            <a:pPr algn="ctr"/>
+            <a:endParaRPr lang="hu-HU"/>
+          </a:p>
+        </p:txBody>
+      </p:sp>
+    </p:spTree>
+    <p:extLst>
+      <p:ext uri="{BB962C8B-B14F-4D97-AF65-F5344CB8AC3E}">
+        <p14:creationId xmlns:p14="http://schemas.microsoft.com/office/powerpoint/2010/main" val="1088826193"/>
+      </p:ext>
+    </p:extLst>
+  </p:cSld>
+  <p:clrMapOvr>
+    <a:masterClrMapping/>
+  </p:clrMapOvr>
+</p:sld>
+</file>
+
+<file path=ppt/slides/slide5.xml><?xml version="1.0" encoding="utf-8"?>
+<p:sld xmlns:a="http://schemas.openxmlformats.org/drawingml/2006/main" xmlns:r="http://schemas.openxmlformats.org/officeDocument/2006/relationships" xmlns:p="http://schemas.openxmlformats.org/presentationml/2006/main">
+  <p:cSld>
+    <p:spTree>
+      <p:nvGrpSpPr>
+        <p:cNvPr id="1" name=""/>
+        <p:cNvGrpSpPr/>
+        <p:nvPr/>
+      </p:nvGrpSpPr>
+      <p:grpSpPr>
+        <a:xfrm>
+          <a:off x="0" y="0"/>
+          <a:ext cx="0" cy="0"/>
+          <a:chOff x="0" y="0"/>
+          <a:chExt cx="0" cy="0"/>
+        </a:xfrm>
+      </p:grpSpPr>
       <p:sp>
         <p:nvSpPr>
           <p:cNvPr id="2" name="Cím 1">
@@ -3935,15 +4502,18 @@
           <a:lstStyle/>
           <a:p>
             <a:r>
-              <a:rPr lang="hu-HU" sz="4400">
+              <a:rPr lang="hu-HU" sz="4800" dirty="0">
                 <a:solidFill>
-                  <a:schemeClr val="bg1"/>
+                  <a:schemeClr val="accent1">
+                    <a:lumMod val="75000"/>
+                  </a:schemeClr>
                 </a:solidFill>
                 <a:latin typeface="Bahnschrift SemiBold SemiConden" panose="020B0502040204020203" pitchFamily="34" charset="0"/>
+                <a:ea typeface="+mn-ea"/>
+                <a:cs typeface="+mn-cs"/>
               </a:rPr>
               <a:t>MEGYE ADATAI</a:t>
             </a:r>
-            <a:endParaRPr lang="hu-HU"/>
           </a:p>
         </p:txBody>
       </p:sp>
@@ -3968,7 +4538,99 @@
           <a:bodyPr/>
           <a:lstStyle/>
           <a:p>
-            <a:endParaRPr lang="hu-HU"/>
+            <a:r>
+              <a:rPr lang="hu-HU" dirty="0">
+                <a:latin typeface="Bahnschrift SemiBold SemiConden" panose="020B0502040204020203" pitchFamily="34" charset="0"/>
+              </a:rPr>
+              <a:t>A funkció kilistázza az összes elérhető egyedi megyekódot, majd bekéri a felhasználótól a vizsgálni kívánt megye kódját. Érvénytelen kód esetén hibaüzenet jelenik meg, és újra kérdez.</a:t>
+            </a:r>
+          </a:p>
+          <a:p>
+            <a:endParaRPr lang="hu-HU" dirty="0"/>
+          </a:p>
+        </p:txBody>
+      </p:sp>
+      <p:pic>
+        <p:nvPicPr>
+          <p:cNvPr id="5" name="Picture 4">
+            <a:extLst>
+              <a:ext uri="{FF2B5EF4-FFF2-40B4-BE49-F238E27FC236}">
+                <a16:creationId xmlns:a16="http://schemas.microsoft.com/office/drawing/2014/main" id="{58A2041B-E8E9-839C-2C19-D5BFD2978C08}"/>
+              </a:ext>
+            </a:extLst>
+          </p:cNvPr>
+          <p:cNvPicPr>
+            <a:picLocks noChangeAspect="1"/>
+          </p:cNvPicPr>
+          <p:nvPr/>
+        </p:nvPicPr>
+        <p:blipFill>
+          <a:blip r:embed="rId2">
+            <a:extLst>
+              <a:ext uri="{28A0092B-C50C-407E-A947-70E740481C1C}">
+                <a14:useLocalDpi xmlns:a14="http://schemas.microsoft.com/office/drawing/2010/main" val="0"/>
+              </a:ext>
+            </a:extLst>
+          </a:blip>
+          <a:srcRect l="6459" t="14859" r="6458" b="14986"/>
+          <a:stretch>
+            <a:fillRect/>
+          </a:stretch>
+        </p:blipFill>
+        <p:spPr>
+          <a:xfrm>
+            <a:off x="1652960" y="3208150"/>
+            <a:ext cx="8886079" cy="3103750"/>
+          </a:xfrm>
+          <a:prstGeom prst="rect">
+            <a:avLst/>
+          </a:prstGeom>
+        </p:spPr>
+      </p:pic>
+      <p:sp>
+        <p:nvSpPr>
+          <p:cNvPr id="7" name="Arrow: Left 6">
+            <a:hlinkClick r:id="rId3" action="ppaction://hlinksldjump"/>
+            <a:extLst>
+              <a:ext uri="{FF2B5EF4-FFF2-40B4-BE49-F238E27FC236}">
+                <a16:creationId xmlns:a16="http://schemas.microsoft.com/office/drawing/2014/main" id="{5ABB8D9C-1434-030E-738D-17E61909377F}"/>
+              </a:ext>
+            </a:extLst>
+          </p:cNvPr>
+          <p:cNvSpPr/>
+          <p:nvPr/>
+        </p:nvSpPr>
+        <p:spPr>
+          <a:xfrm>
+            <a:off x="241300" y="6176963"/>
+            <a:ext cx="850900" cy="414337"/>
+          </a:xfrm>
+          <a:prstGeom prst="leftArrow">
+            <a:avLst/>
+          </a:prstGeom>
+        </p:spPr>
+        <p:style>
+          <a:lnRef idx="2">
+            <a:schemeClr val="accent1">
+              <a:shade val="15000"/>
+            </a:schemeClr>
+          </a:lnRef>
+          <a:fillRef idx="1">
+            <a:schemeClr val="accent1"/>
+          </a:fillRef>
+          <a:effectRef idx="0">
+            <a:schemeClr val="accent1"/>
+          </a:effectRef>
+          <a:fontRef idx="minor">
+            <a:schemeClr val="lt1"/>
+          </a:fontRef>
+        </p:style>
+        <p:txBody>
+          <a:bodyPr rtlCol="0" anchor="ctr"/>
+          <a:lstStyle/>
+          <a:p>
+            <a:pPr algn="ctr"/>
+            <a:endParaRPr lang="hu-HU" dirty="0"/>
           </a:p>
         </p:txBody>
       </p:sp>
@@ -3976,6 +4638,509 @@
     <p:extLst>
       <p:ext uri="{BB962C8B-B14F-4D97-AF65-F5344CB8AC3E}">
         <p14:creationId xmlns:p14="http://schemas.microsoft.com/office/powerpoint/2010/main" val="1373732303"/>
+      </p:ext>
+    </p:extLst>
+  </p:cSld>
+  <p:clrMapOvr>
+    <a:masterClrMapping/>
+  </p:clrMapOvr>
+</p:sld>
+</file>
+
+<file path=ppt/slides/slide6.xml><?xml version="1.0" encoding="utf-8"?>
+<p:sld xmlns:a="http://schemas.openxmlformats.org/drawingml/2006/main" xmlns:r="http://schemas.openxmlformats.org/officeDocument/2006/relationships" xmlns:p="http://schemas.openxmlformats.org/presentationml/2006/main">
+  <p:cSld>
+    <p:spTree>
+      <p:nvGrpSpPr>
+        <p:cNvPr id="1" name=""/>
+        <p:cNvGrpSpPr/>
+        <p:nvPr/>
+      </p:nvGrpSpPr>
+      <p:grpSpPr>
+        <a:xfrm>
+          <a:off x="0" y="0"/>
+          <a:ext cx="0" cy="0"/>
+          <a:chOff x="0" y="0"/>
+          <a:chExt cx="0" cy="0"/>
+        </a:xfrm>
+      </p:grpSpPr>
+      <p:sp>
+        <p:nvSpPr>
+          <p:cNvPr id="2" name="Title 1">
+            <a:extLst>
+              <a:ext uri="{FF2B5EF4-FFF2-40B4-BE49-F238E27FC236}">
+                <a16:creationId xmlns:a16="http://schemas.microsoft.com/office/drawing/2014/main" id="{A000537D-37B0-E0DF-5704-B3AF425357E4}"/>
+              </a:ext>
+            </a:extLst>
+          </p:cNvPr>
+          <p:cNvSpPr>
+            <a:spLocks noGrp="1"/>
+          </p:cNvSpPr>
+          <p:nvPr>
+            <p:ph type="title"/>
+          </p:nvPr>
+        </p:nvSpPr>
+        <p:spPr/>
+        <p:txBody>
+          <a:bodyPr/>
+          <a:lstStyle/>
+          <a:p>
+            <a:r>
+              <a:rPr lang="hu-HU" sz="4800" dirty="0">
+                <a:solidFill>
+                  <a:schemeClr val="accent1">
+                    <a:lumMod val="75000"/>
+                  </a:schemeClr>
+                </a:solidFill>
+                <a:latin typeface="Bahnschrift SemiBold SemiConden" panose="020B0502040204020203" pitchFamily="34" charset="0"/>
+                <a:ea typeface="+mn-ea"/>
+                <a:cs typeface="+mn-cs"/>
+              </a:rPr>
+              <a:t>TELEPÜLÉS TÍPUSAI</a:t>
+            </a:r>
+          </a:p>
+        </p:txBody>
+      </p:sp>
+      <p:sp>
+        <p:nvSpPr>
+          <p:cNvPr id="3" name="Content Placeholder 2">
+            <a:extLst>
+              <a:ext uri="{FF2B5EF4-FFF2-40B4-BE49-F238E27FC236}">
+                <a16:creationId xmlns:a16="http://schemas.microsoft.com/office/drawing/2014/main" id="{E4AF03DE-5993-62BE-E331-A564121FA177}"/>
+              </a:ext>
+            </a:extLst>
+          </p:cNvPr>
+          <p:cNvSpPr>
+            <a:spLocks noGrp="1"/>
+          </p:cNvSpPr>
+          <p:nvPr>
+            <p:ph idx="1"/>
+          </p:nvPr>
+        </p:nvSpPr>
+        <p:spPr/>
+        <p:txBody>
+          <a:bodyPr/>
+          <a:lstStyle/>
+          <a:p>
+            <a:r>
+              <a:rPr lang="hu-HU" dirty="0">
+                <a:latin typeface="Bahnschrift SemiBold SemiConden" panose="020B0502040204020203" pitchFamily="34" charset="0"/>
+              </a:rPr>
+              <a:t>Településtípus szerint szűrjük az adatbázist. A program automatikusan kigyűjti az összes egyedi típust, sorszámozott listát jelenít meg, majd a felhasználó választása alapján szűr.</a:t>
+            </a:r>
+          </a:p>
+          <a:p>
+            <a:endParaRPr lang="hu-HU" dirty="0"/>
+          </a:p>
+        </p:txBody>
+      </p:sp>
+      <p:sp>
+        <p:nvSpPr>
+          <p:cNvPr id="5" name="Arrow: Left 4">
+            <a:hlinkClick r:id="rId2" action="ppaction://hlinksldjump"/>
+            <a:extLst>
+              <a:ext uri="{FF2B5EF4-FFF2-40B4-BE49-F238E27FC236}">
+                <a16:creationId xmlns:a16="http://schemas.microsoft.com/office/drawing/2014/main" id="{D56444AC-2CC5-B4DB-A9C2-CB2D2FAEAEC0}"/>
+              </a:ext>
+            </a:extLst>
+          </p:cNvPr>
+          <p:cNvSpPr/>
+          <p:nvPr/>
+        </p:nvSpPr>
+        <p:spPr>
+          <a:xfrm>
+            <a:off x="241300" y="6176963"/>
+            <a:ext cx="850900" cy="414337"/>
+          </a:xfrm>
+          <a:prstGeom prst="leftArrow">
+            <a:avLst/>
+          </a:prstGeom>
+        </p:spPr>
+        <p:style>
+          <a:lnRef idx="2">
+            <a:schemeClr val="accent1">
+              <a:shade val="15000"/>
+            </a:schemeClr>
+          </a:lnRef>
+          <a:fillRef idx="1">
+            <a:schemeClr val="accent1"/>
+          </a:fillRef>
+          <a:effectRef idx="0">
+            <a:schemeClr val="accent1"/>
+          </a:effectRef>
+          <a:fontRef idx="minor">
+            <a:schemeClr val="lt1"/>
+          </a:fontRef>
+        </p:style>
+        <p:txBody>
+          <a:bodyPr rtlCol="0" anchor="ctr"/>
+          <a:lstStyle/>
+          <a:p>
+            <a:pPr algn="ctr"/>
+            <a:endParaRPr lang="hu-HU"/>
+          </a:p>
+        </p:txBody>
+      </p:sp>
+      <p:pic>
+        <p:nvPicPr>
+          <p:cNvPr id="7" name="Picture 6">
+            <a:extLst>
+              <a:ext uri="{FF2B5EF4-FFF2-40B4-BE49-F238E27FC236}">
+                <a16:creationId xmlns:a16="http://schemas.microsoft.com/office/drawing/2014/main" id="{9F9FB094-5611-DA9E-F6B7-7E74DE2A560A}"/>
+              </a:ext>
+            </a:extLst>
+          </p:cNvPr>
+          <p:cNvPicPr>
+            <a:picLocks noChangeAspect="1"/>
+          </p:cNvPicPr>
+          <p:nvPr/>
+        </p:nvPicPr>
+        <p:blipFill>
+          <a:blip r:embed="rId3">
+            <a:extLst>
+              <a:ext uri="{28A0092B-C50C-407E-A947-70E740481C1C}">
+                <a14:useLocalDpi xmlns:a14="http://schemas.microsoft.com/office/drawing/2010/main" val="0"/>
+              </a:ext>
+            </a:extLst>
+          </a:blip>
+          <a:srcRect l="7466" t="15567" r="7187" b="15761"/>
+          <a:stretch>
+            <a:fillRect/>
+          </a:stretch>
+        </p:blipFill>
+        <p:spPr>
+          <a:xfrm>
+            <a:off x="2156883" y="3429000"/>
+            <a:ext cx="7878234" cy="2929498"/>
+          </a:xfrm>
+          <a:prstGeom prst="rect">
+            <a:avLst/>
+          </a:prstGeom>
+        </p:spPr>
+      </p:pic>
+    </p:spTree>
+    <p:extLst>
+      <p:ext uri="{BB962C8B-B14F-4D97-AF65-F5344CB8AC3E}">
+        <p14:creationId xmlns:p14="http://schemas.microsoft.com/office/powerpoint/2010/main" val="1634084639"/>
+      </p:ext>
+    </p:extLst>
+  </p:cSld>
+  <p:clrMapOvr>
+    <a:masterClrMapping/>
+  </p:clrMapOvr>
+</p:sld>
+</file>
+
+<file path=ppt/slides/slide7.xml><?xml version="1.0" encoding="utf-8"?>
+<p:sld xmlns:a="http://schemas.openxmlformats.org/drawingml/2006/main" xmlns:r="http://schemas.openxmlformats.org/officeDocument/2006/relationships" xmlns:p="http://schemas.openxmlformats.org/presentationml/2006/main">
+  <p:cSld>
+    <p:spTree>
+      <p:nvGrpSpPr>
+        <p:cNvPr id="1" name=""/>
+        <p:cNvGrpSpPr/>
+        <p:nvPr/>
+      </p:nvGrpSpPr>
+      <p:grpSpPr>
+        <a:xfrm>
+          <a:off x="0" y="0"/>
+          <a:ext cx="0" cy="0"/>
+          <a:chOff x="0" y="0"/>
+          <a:chExt cx="0" cy="0"/>
+        </a:xfrm>
+      </p:grpSpPr>
+      <p:sp>
+        <p:nvSpPr>
+          <p:cNvPr id="2" name="Title 1">
+            <a:extLst>
+              <a:ext uri="{FF2B5EF4-FFF2-40B4-BE49-F238E27FC236}">
+                <a16:creationId xmlns:a16="http://schemas.microsoft.com/office/drawing/2014/main" id="{557E4829-0292-9213-002B-54B84FC9E8E7}"/>
+              </a:ext>
+            </a:extLst>
+          </p:cNvPr>
+          <p:cNvSpPr>
+            <a:spLocks noGrp="1"/>
+          </p:cNvSpPr>
+          <p:nvPr>
+            <p:ph type="title"/>
+          </p:nvPr>
+        </p:nvSpPr>
+        <p:spPr/>
+        <p:txBody>
+          <a:bodyPr/>
+          <a:lstStyle/>
+          <a:p>
+            <a:r>
+              <a:rPr lang="hu-HU" sz="4800" dirty="0">
+                <a:solidFill>
+                  <a:schemeClr val="accent1">
+                    <a:lumMod val="75000"/>
+                  </a:schemeClr>
+                </a:solidFill>
+                <a:latin typeface="Bahnschrift SemiBold SemiConden" panose="020B0502040204020203" pitchFamily="34" charset="0"/>
+                <a:ea typeface="+mn-ea"/>
+                <a:cs typeface="+mn-cs"/>
+              </a:rPr>
+              <a:t>Lapozás</a:t>
+            </a:r>
+          </a:p>
+        </p:txBody>
+      </p:sp>
+      <p:sp>
+        <p:nvSpPr>
+          <p:cNvPr id="3" name="Content Placeholder 2">
+            <a:extLst>
+              <a:ext uri="{FF2B5EF4-FFF2-40B4-BE49-F238E27FC236}">
+                <a16:creationId xmlns:a16="http://schemas.microsoft.com/office/drawing/2014/main" id="{7C8059AB-7DF4-90CA-D715-E81C9C335B6E}"/>
+              </a:ext>
+            </a:extLst>
+          </p:cNvPr>
+          <p:cNvSpPr>
+            <a:spLocks noGrp="1"/>
+          </p:cNvSpPr>
+          <p:nvPr>
+            <p:ph idx="1"/>
+          </p:nvPr>
+        </p:nvSpPr>
+        <p:spPr>
+          <a:xfrm>
+            <a:off x="838200" y="1825625"/>
+            <a:ext cx="6087533" cy="4351338"/>
+          </a:xfrm>
+        </p:spPr>
+        <p:txBody>
+          <a:bodyPr/>
+          <a:lstStyle/>
+          <a:p>
+            <a:r>
+              <a:rPr lang="hu-HU" dirty="0">
+                <a:latin typeface="Bahnschrift SemiBold SemiConden" panose="020B0502040204020203" pitchFamily="34" charset="0"/>
+              </a:rPr>
+              <a:t>A nagyszámú találat áttekinthető megjelenítésére a program 15 elemes lapokra bontja a listát. A felhasználó navigálhat előre, hátra, vagy közvetlenül ugorhat egy adott oldalra.</a:t>
+            </a:r>
+          </a:p>
+          <a:p>
+            <a:r>
+              <a:rPr lang="hu-HU" dirty="0">
+                <a:latin typeface="Bahnschrift SemiBold SemiConden" panose="020B0502040204020203" pitchFamily="34" charset="0"/>
+              </a:rPr>
+              <a:t>Az oldalszámítás math.ceil nélkül történik: (osszes_sor + PAGE_SIZE - 1) // PAGE_SIZE</a:t>
+            </a:r>
+          </a:p>
+          <a:p>
+            <a:endParaRPr lang="hu-HU" dirty="0"/>
+          </a:p>
+        </p:txBody>
+      </p:sp>
+      <p:sp>
+        <p:nvSpPr>
+          <p:cNvPr id="5" name="Arrow: Left 4">
+            <a:hlinkClick r:id="rId2" action="ppaction://hlinksldjump"/>
+            <a:extLst>
+              <a:ext uri="{FF2B5EF4-FFF2-40B4-BE49-F238E27FC236}">
+                <a16:creationId xmlns:a16="http://schemas.microsoft.com/office/drawing/2014/main" id="{406C0A1B-FF60-6D80-5CA4-2BB6BB49BE51}"/>
+              </a:ext>
+            </a:extLst>
+          </p:cNvPr>
+          <p:cNvSpPr/>
+          <p:nvPr/>
+        </p:nvSpPr>
+        <p:spPr>
+          <a:xfrm>
+            <a:off x="241300" y="6176963"/>
+            <a:ext cx="850900" cy="414337"/>
+          </a:xfrm>
+          <a:prstGeom prst="leftArrow">
+            <a:avLst/>
+          </a:prstGeom>
+        </p:spPr>
+        <p:style>
+          <a:lnRef idx="2">
+            <a:schemeClr val="accent1">
+              <a:shade val="15000"/>
+            </a:schemeClr>
+          </a:lnRef>
+          <a:fillRef idx="1">
+            <a:schemeClr val="accent1"/>
+          </a:fillRef>
+          <a:effectRef idx="0">
+            <a:schemeClr val="accent1"/>
+          </a:effectRef>
+          <a:fontRef idx="minor">
+            <a:schemeClr val="lt1"/>
+          </a:fontRef>
+        </p:style>
+        <p:txBody>
+          <a:bodyPr rtlCol="0" anchor="ctr"/>
+          <a:lstStyle/>
+          <a:p>
+            <a:pPr algn="ctr"/>
+            <a:endParaRPr lang="hu-HU"/>
+          </a:p>
+        </p:txBody>
+      </p:sp>
+      <p:pic>
+        <p:nvPicPr>
+          <p:cNvPr id="9" name="Picture 8">
+            <a:extLst>
+              <a:ext uri="{FF2B5EF4-FFF2-40B4-BE49-F238E27FC236}">
+                <a16:creationId xmlns:a16="http://schemas.microsoft.com/office/drawing/2014/main" id="{34923791-4283-0117-353F-0198E2F645B8}"/>
+              </a:ext>
+            </a:extLst>
+          </p:cNvPr>
+          <p:cNvPicPr>
+            <a:picLocks noChangeAspect="1"/>
+          </p:cNvPicPr>
+          <p:nvPr/>
+        </p:nvPicPr>
+        <p:blipFill>
+          <a:blip r:embed="rId3">
+            <a:extLst>
+              <a:ext uri="{28A0092B-C50C-407E-A947-70E740481C1C}">
+                <a14:useLocalDpi xmlns:a14="http://schemas.microsoft.com/office/drawing/2010/main" val="0"/>
+              </a:ext>
+            </a:extLst>
+          </a:blip>
+          <a:srcRect l="8092" t="9931" r="7992" b="9931"/>
+          <a:stretch>
+            <a:fillRect/>
+          </a:stretch>
+        </p:blipFill>
+        <p:spPr>
+          <a:xfrm>
+            <a:off x="6925733" y="1825625"/>
+            <a:ext cx="5156201" cy="3989297"/>
+          </a:xfrm>
+          <a:prstGeom prst="rect">
+            <a:avLst/>
+          </a:prstGeom>
+        </p:spPr>
+      </p:pic>
+    </p:spTree>
+    <p:extLst>
+      <p:ext uri="{BB962C8B-B14F-4D97-AF65-F5344CB8AC3E}">
+        <p14:creationId xmlns:p14="http://schemas.microsoft.com/office/powerpoint/2010/main" val="1350055682"/>
+      </p:ext>
+    </p:extLst>
+  </p:cSld>
+  <p:clrMapOvr>
+    <a:masterClrMapping/>
+  </p:clrMapOvr>
+</p:sld>
+</file>
+
+<file path=ppt/slides/slide8.xml><?xml version="1.0" encoding="utf-8"?>
+<p:sld xmlns:a="http://schemas.openxmlformats.org/drawingml/2006/main" xmlns:r="http://schemas.openxmlformats.org/officeDocument/2006/relationships" xmlns:p="http://schemas.openxmlformats.org/presentationml/2006/main">
+  <p:cSld>
+    <p:spTree>
+      <p:nvGrpSpPr>
+        <p:cNvPr id="1" name=""/>
+        <p:cNvGrpSpPr/>
+        <p:nvPr/>
+      </p:nvGrpSpPr>
+      <p:grpSpPr>
+        <a:xfrm>
+          <a:off x="0" y="0"/>
+          <a:ext cx="0" cy="0"/>
+          <a:chOff x="0" y="0"/>
+          <a:chExt cx="0" cy="0"/>
+        </a:xfrm>
+      </p:grpSpPr>
+      <p:sp>
+        <p:nvSpPr>
+          <p:cNvPr id="2" name="Title 1">
+            <a:extLst>
+              <a:ext uri="{FF2B5EF4-FFF2-40B4-BE49-F238E27FC236}">
+                <a16:creationId xmlns:a16="http://schemas.microsoft.com/office/drawing/2014/main" id="{B1BD1BC9-A7CD-9355-9BCF-1685A0421F18}"/>
+              </a:ext>
+            </a:extLst>
+          </p:cNvPr>
+          <p:cNvSpPr>
+            <a:spLocks noGrp="1"/>
+          </p:cNvSpPr>
+          <p:nvPr>
+            <p:ph type="title"/>
+          </p:nvPr>
+        </p:nvSpPr>
+        <p:spPr>
+          <a:xfrm>
+            <a:off x="838200" y="3082925"/>
+            <a:ext cx="10515600" cy="1325563"/>
+          </a:xfrm>
+        </p:spPr>
+        <p:txBody>
+          <a:bodyPr>
+            <a:normAutofit/>
+          </a:bodyPr>
+          <a:lstStyle/>
+          <a:p>
+            <a:pPr algn="ctr"/>
+            <a:r>
+              <a:rPr lang="hu-HU" sz="8800" dirty="0">
+                <a:solidFill>
+                  <a:schemeClr val="accent1">
+                    <a:lumMod val="75000"/>
+                  </a:schemeClr>
+                </a:solidFill>
+                <a:latin typeface="Bahnschrift SemiBold SemiConden" panose="020B0502040204020203" pitchFamily="34" charset="0"/>
+                <a:ea typeface="+mn-ea"/>
+                <a:cs typeface="+mn-cs"/>
+              </a:rPr>
+              <a:t>Köszönjük a figyelmet!</a:t>
+            </a:r>
+          </a:p>
+        </p:txBody>
+      </p:sp>
+      <p:sp>
+        <p:nvSpPr>
+          <p:cNvPr id="5" name="Arrow: Left 4">
+            <a:hlinkClick r:id="rId2" action="ppaction://hlinksldjump"/>
+            <a:extLst>
+              <a:ext uri="{FF2B5EF4-FFF2-40B4-BE49-F238E27FC236}">
+                <a16:creationId xmlns:a16="http://schemas.microsoft.com/office/drawing/2014/main" id="{8B12D808-8B6F-CF24-380C-3F9BFFD3C6C3}"/>
+              </a:ext>
+            </a:extLst>
+          </p:cNvPr>
+          <p:cNvSpPr/>
+          <p:nvPr/>
+        </p:nvSpPr>
+        <p:spPr>
+          <a:xfrm>
+            <a:off x="241300" y="6176963"/>
+            <a:ext cx="850900" cy="414337"/>
+          </a:xfrm>
+          <a:prstGeom prst="leftArrow">
+            <a:avLst/>
+          </a:prstGeom>
+        </p:spPr>
+        <p:style>
+          <a:lnRef idx="2">
+            <a:schemeClr val="accent1">
+              <a:shade val="15000"/>
+            </a:schemeClr>
+          </a:lnRef>
+          <a:fillRef idx="1">
+            <a:schemeClr val="accent1"/>
+          </a:fillRef>
+          <a:effectRef idx="0">
+            <a:schemeClr val="accent1"/>
+          </a:effectRef>
+          <a:fontRef idx="minor">
+            <a:schemeClr val="lt1"/>
+          </a:fontRef>
+        </p:style>
+        <p:txBody>
+          <a:bodyPr rtlCol="0" anchor="ctr"/>
+          <a:lstStyle/>
+          <a:p>
+            <a:pPr algn="ctr"/>
+            <a:endParaRPr lang="hu-HU"/>
+          </a:p>
+        </p:txBody>
+      </p:sp>
+    </p:spTree>
+    <p:extLst>
+      <p:ext uri="{BB962C8B-B14F-4D97-AF65-F5344CB8AC3E}">
+        <p14:creationId xmlns:p14="http://schemas.microsoft.com/office/powerpoint/2010/main" val="976116189"/>
       </p:ext>
     </p:extLst>
   </p:cSld>

--- a/Népesség 2025.pptx
+++ b/Népesség 2025.pptx
@@ -266,7 +266,7 @@
           <a:p>
             <a:fld id="{0BC76379-3D6E-40BA-A44C-3D5E7FAE47E0}" type="datetimeFigureOut">
               <a:rPr lang="hu-HU" smtClean="0"/>
-              <a:t>2026. 09. 17.</a:t>
+              <a:t>2026. 09. 18.</a:t>
             </a:fld>
             <a:endParaRPr lang="hu-HU"/>
           </a:p>
@@ -464,7 +464,7 @@
           <a:p>
             <a:fld id="{0BC76379-3D6E-40BA-A44C-3D5E7FAE47E0}" type="datetimeFigureOut">
               <a:rPr lang="hu-HU" smtClean="0"/>
-              <a:t>2026. 09. 17.</a:t>
+              <a:t>2026. 09. 18.</a:t>
             </a:fld>
             <a:endParaRPr lang="hu-HU"/>
           </a:p>
@@ -672,7 +672,7 @@
           <a:p>
             <a:fld id="{0BC76379-3D6E-40BA-A44C-3D5E7FAE47E0}" type="datetimeFigureOut">
               <a:rPr lang="hu-HU" smtClean="0"/>
-              <a:t>2026. 09. 17.</a:t>
+              <a:t>2026. 09. 18.</a:t>
             </a:fld>
             <a:endParaRPr lang="hu-HU"/>
           </a:p>
@@ -870,7 +870,7 @@
           <a:p>
             <a:fld id="{0BC76379-3D6E-40BA-A44C-3D5E7FAE47E0}" type="datetimeFigureOut">
               <a:rPr lang="hu-HU" smtClean="0"/>
-              <a:t>2026. 09. 17.</a:t>
+              <a:t>2026. 09. 18.</a:t>
             </a:fld>
             <a:endParaRPr lang="hu-HU"/>
           </a:p>
@@ -1145,7 +1145,7 @@
           <a:p>
             <a:fld id="{0BC76379-3D6E-40BA-A44C-3D5E7FAE47E0}" type="datetimeFigureOut">
               <a:rPr lang="hu-HU" smtClean="0"/>
-              <a:t>2026. 09. 17.</a:t>
+              <a:t>2026. 09. 18.</a:t>
             </a:fld>
             <a:endParaRPr lang="hu-HU"/>
           </a:p>
@@ -1410,7 +1410,7 @@
           <a:p>
             <a:fld id="{0BC76379-3D6E-40BA-A44C-3D5E7FAE47E0}" type="datetimeFigureOut">
               <a:rPr lang="hu-HU" smtClean="0"/>
-              <a:t>2026. 09. 17.</a:t>
+              <a:t>2026. 09. 18.</a:t>
             </a:fld>
             <a:endParaRPr lang="hu-HU"/>
           </a:p>
@@ -1822,7 +1822,7 @@
           <a:p>
             <a:fld id="{0BC76379-3D6E-40BA-A44C-3D5E7FAE47E0}" type="datetimeFigureOut">
               <a:rPr lang="hu-HU" smtClean="0"/>
-              <a:t>2026. 09. 17.</a:t>
+              <a:t>2026. 09. 18.</a:t>
             </a:fld>
             <a:endParaRPr lang="hu-HU"/>
           </a:p>
@@ -1963,7 +1963,7 @@
           <a:p>
             <a:fld id="{0BC76379-3D6E-40BA-A44C-3D5E7FAE47E0}" type="datetimeFigureOut">
               <a:rPr lang="hu-HU" smtClean="0"/>
-              <a:t>2026. 09. 17.</a:t>
+              <a:t>2026. 09. 18.</a:t>
             </a:fld>
             <a:endParaRPr lang="hu-HU"/>
           </a:p>
@@ -2076,7 +2076,7 @@
           <a:p>
             <a:fld id="{0BC76379-3D6E-40BA-A44C-3D5E7FAE47E0}" type="datetimeFigureOut">
               <a:rPr lang="hu-HU" smtClean="0"/>
-              <a:t>2026. 09. 17.</a:t>
+              <a:t>2026. 09. 18.</a:t>
             </a:fld>
             <a:endParaRPr lang="hu-HU"/>
           </a:p>
@@ -2387,7 +2387,7 @@
           <a:p>
             <a:fld id="{0BC76379-3D6E-40BA-A44C-3D5E7FAE47E0}" type="datetimeFigureOut">
               <a:rPr lang="hu-HU" smtClean="0"/>
-              <a:t>2026. 09. 17.</a:t>
+              <a:t>2026. 09. 18.</a:t>
             </a:fld>
             <a:endParaRPr lang="hu-HU"/>
           </a:p>
@@ -2675,7 +2675,7 @@
           <a:p>
             <a:fld id="{0BC76379-3D6E-40BA-A44C-3D5E7FAE47E0}" type="datetimeFigureOut">
               <a:rPr lang="hu-HU" smtClean="0"/>
-              <a:t>2026. 09. 17.</a:t>
+              <a:t>2026. 09. 18.</a:t>
             </a:fld>
             <a:endParaRPr lang="hu-HU"/>
           </a:p>
@@ -2946,7 +2946,7 @@
           <a:p>
             <a:fld id="{0BC76379-3D6E-40BA-A44C-3D5E7FAE47E0}" type="datetimeFigureOut">
               <a:rPr lang="hu-HU" smtClean="0"/>
-              <a:t>2026. 09. 17.</a:t>
+              <a:t>2026. 09. 18.</a:t>
             </a:fld>
             <a:endParaRPr lang="hu-HU"/>
           </a:p>
@@ -3420,7 +3420,7 @@
               <a:rPr lang="hu-HU" dirty="0">
                 <a:latin typeface="Bahnschrift SemiBold SemiConden" panose="020B0502040204020203" pitchFamily="34" charset="0"/>
               </a:rPr>
-              <a:t>Készítette: Farkas Márton Kende, Debreceni Dorián</a:t>
+              <a:t>Készítette: Farkas Márton Kende: Program Kód, Debreceni Dorián: PPT, Apró Simítások a Kódba</a:t>
             </a:r>
           </a:p>
         </p:txBody>
@@ -3700,13 +3700,13 @@
   <p:clrMapOvr>
     <a:masterClrMapping/>
   </p:clrMapOvr>
-  <mc:AlternateContent xmlns:mc="http://schemas.openxmlformats.org/markup-compatibility/2006">
-    <mc:Choice xmlns:p159="http://schemas.microsoft.com/office/powerpoint/2015/09/main" Requires="p159">
+  <mc:AlternateContent xmlns:mc="http://schemas.openxmlformats.org/markup-compatibility/2006" xmlns:p159="http://schemas.microsoft.com/office/powerpoint/2015/09/main">
+    <mc:Choice Requires="p159">
       <p:transition xmlns:p14="http://schemas.microsoft.com/office/powerpoint/2010/main" spd="slow" p14:dur="2000">
         <p159:morph option="byObject"/>
       </p:transition>
     </mc:Choice>
-    <mc:Fallback>
+    <mc:Fallback xmlns="">
       <p:transition spd="slow">
         <p:fade/>
       </p:transition>
@@ -4007,13 +4007,13 @@
   <p:clrMapOvr>
     <a:masterClrMapping/>
   </p:clrMapOvr>
-  <mc:AlternateContent xmlns:mc="http://schemas.openxmlformats.org/markup-compatibility/2006">
-    <mc:Choice xmlns:p159="http://schemas.microsoft.com/office/powerpoint/2015/09/main" Requires="p159">
+  <mc:AlternateContent xmlns:mc="http://schemas.openxmlformats.org/markup-compatibility/2006" xmlns:p159="http://schemas.microsoft.com/office/powerpoint/2015/09/main">
+    <mc:Choice Requires="p159">
       <p:transition xmlns:p14="http://schemas.microsoft.com/office/powerpoint/2010/main" spd="slow" p14:dur="2000">
         <p159:morph option="byObject"/>
       </p:transition>
     </mc:Choice>
-    <mc:Fallback>
+    <mc:Fallback xmlns="">
       <p:transition spd="slow">
         <p:fade/>
       </p:transition>
